--- a/decks/day4/module-2-orchestration-patterns.pptx
+++ b/decks/day4/module-2-orchestration-patterns.pptx
@@ -21,9 +21,10 @@
     <p:sldId id="269" r:id="rId15"/>
     <p:sldId id="270" r:id="rId16"/>
     <p:sldId id="271" r:id="rId17"/>
+    <p:sldId id="272" r:id="rId18"/>
   </p:sldIdLst>
   <p:notesMasterIdLst>
-    <p:notesMasterId r:id="rId18"/>
+    <p:notesMasterId r:id="rId19"/>
   </p:notesMasterIdLst>
   <p:sldSz cx="9144000" cy="5143500"/>
   <p:notesSz cx="5143500" cy="9144000"/>
@@ -606,8 +607,8 @@
           <a:p>
             <a:r>
               <a:rPr lang="en-US" dirty="0"/>
-              <a:t>• Star topology with an orchestrator in the middle — the key contrast with Handoff's mesh, no-orchestrator design. Context Synchronization is worth stating precisely: agents do NOT share one AgentSession instance (different agent types may implement it differently); the orchestrator broadcasts each response so every agent's own session stays in sync before its next turn. Diagram reproduced verbatim from the official Group Chat orchestration Learn page.
-• GROUNDING SOURCE: https://learn.microsoft.com/en-us/agent-framework/workflows/orchestrations/group-chat</a:t>
+              <a:t>• add_handoff restricts routing (by default every agent can hand off to every other); the mesh topology for context-sharing stays intact regardless — restricting handoff rules only governs who can take over next, not who sees the conversation. Interactive by default: when an agent responds without handing off, control returns to the user for the next input.
+• GROUNDING SOURCE: https://learn.microsoft.com/en-us/agent-framework/workflows/orchestrations/handoff</a:t>
             </a:r>
             <a:endParaRPr lang="en-US" dirty="0"/>
           </a:p>
@@ -695,7 +696,7 @@
           <a:p>
             <a:r>
               <a:rPr lang="en-US" dirty="0"/>
-              <a:t>• This "consider alternatives" list is the framework's own — reproduced verbatim rather than paraphrased, since it's a direct decision aid.
+              <a:t>• Star topology with an orchestrator in the middle — the key contrast with Handoff's mesh, no-orchestrator design. Context Synchronization is worth stating precisely: agents do NOT share one AgentSession instance (different agent types may implement it differently); the orchestrator broadcasts each response so every agent's own session stays in sync before its next turn. Diagram reproduced verbatim from the official Group Chat orchestration Learn page.
 • GROUNDING SOURCE: https://learn.microsoft.com/en-us/agent-framework/workflows/orchestrations/group-chat</a:t>
             </a:r>
             <a:endParaRPr lang="en-US" dirty="0"/>
@@ -784,8 +785,8 @@
           <a:p>
             <a:r>
               <a:rPr lang="en-US" dirty="0"/>
-              <a:t>• Same star-topology architecture as Group Chat, but the manager plans and tracks progress rather than just picking a speaker. Based on AutoGen's Magentic-One design. The docs' own caveat about untested generalization is worth stating plainly, not softening.
-• GROUNDING SOURCE: https://learn.microsoft.com/en-us/agent-framework/workflows/orchestrations/magentic</a:t>
+              <a:t>• This "consider alternatives" list is the framework's own — reproduced verbatim rather than paraphrased, since it's a direct decision aid.
+• GROUNDING SOURCE: https://learn.microsoft.com/en-us/agent-framework/workflows/orchestrations/group-chat</a:t>
             </a:r>
             <a:endParaRPr lang="en-US" dirty="0"/>
           </a:p>
@@ -873,7 +874,7 @@
           <a:p>
             <a:r>
               <a:rPr lang="en-US" dirty="0"/>
-              <a:t>• Full-width, not paired with bullets — this diagram (task ledger, progress ledger, stall-count decision, replan loop) has far more detail and smaller text than the other four patterns' diagrams, and would be illegible if squeezed into the same narrow list-image column. Reproduced verbatim from the official Magentic orchestration Learn page; note its visual style (flat decision-diamond flowchart) differs from the other four patterns' hand-drawn diagrams — it comes from the Magentic-One design, not the same source illustration set.
+              <a:t>• Same star-topology architecture as Group Chat, but the manager plans and tracks progress rather than just picking a speaker. Based on AutoGen's Magentic-One design. The docs' own caveat about untested generalization is worth stating plainly, not softening.
 • GROUNDING SOURCE: https://learn.microsoft.com/en-us/agent-framework/workflows/orchestrations/magentic</a:t>
             </a:r>
             <a:endParaRPr lang="en-US" dirty="0"/>
@@ -962,7 +963,7 @@
           <a:p>
             <a:r>
               <a:rPr lang="en-US" dirty="0"/>
-              <a:t>• This is a genuinely useful bridge into Module 6 — Magentic ships with its own bounded-loop parameters and a stall-detection/replan mechanism, the most concrete built-in example of the guardrails Module 6 discusses generically.
+              <a:t>• Full-width, not paired with bullets — this diagram (task ledger, progress ledger, stall-count decision, replan loop) has far more detail and smaller text than the other four patterns' diagrams, and would be illegible if squeezed into the same narrow list-image column. Reproduced verbatim from the official Magentic orchestration Learn page; note its visual style (flat decision-diamond flowchart) differs from the other four patterns' hand-drawn diagrams — it comes from the Magentic-One design, not the same source illustration set.
 • GROUNDING SOURCE: https://learn.microsoft.com/en-us/agent-framework/workflows/orchestrations/magentic</a:t>
             </a:r>
             <a:endParaRPr lang="en-US" dirty="0"/>
@@ -1051,9 +1052,8 @@
           <a:p>
             <a:r>
               <a:rPr lang="en-US" dirty="0"/>
-              <a:t>• This table synthesizes the mechanics from every pattern page above plus the superstep execution model (Module 3) — it is this workshop's own engineering judgment, not a verbatim framework table. Flag that explicitly if asked: cost/latency direction is reasoned from documented behavior (parallel supersteps, full-context broadcasts, bounded rounds), not a quoted benchmark.
-• GROUNDING SOURCE: https://learn.microsoft.com/en-us/agent-framework/workflows/orchestrations/
-• GROUNDING SOURCE: https://learn.microsoft.com/en-us/agent-framework/concepts/workflows/builder-and-execution</a:t>
+              <a:t>• This is a genuinely useful bridge into Module 6 — Magentic ships with its own bounded-loop parameters and a stall-detection/replan mechanism, the most concrete built-in example of the guardrails Module 6 discusses generically.
+• GROUNDING SOURCE: https://learn.microsoft.com/en-us/agent-framework/workflows/orchestrations/magentic</a:t>
             </a:r>
             <a:endParaRPr lang="en-US" dirty="0"/>
           </a:p>
@@ -1141,8 +1141,9 @@
           <a:p>
             <a:r>
               <a:rPr lang="en-US" dirty="0"/>
-              <a:t>• Ask attendees which pattern the lab's Planner/Retriever/Critic revision loop maps to. The honest answer, per Module 3: none of them directly — Sequential can't loop back, so the lab builds a custom graph. That's the bridge into Module 3.
-• GROUNDING SOURCE: https://learn.microsoft.com/en-us/agent-framework/workflows/orchestrations/</a:t>
+              <a:t>• This table synthesizes the mechanics from every pattern page above plus the superstep execution model (Module 3) — it is this workshop's own engineering judgment, not a verbatim framework table. Flag that explicitly if asked: cost/latency direction is reasoned from documented behavior (parallel supersteps, full-context broadcasts, bounded rounds), not a quoted benchmark.
+• GROUNDING SOURCE: https://learn.microsoft.com/en-us/agent-framework/workflows/orchestrations/
+• GROUNDING SOURCE: https://learn.microsoft.com/en-us/agent-framework/concepts/workflows/builder-and-execution</a:t>
             </a:r>
             <a:endParaRPr lang="en-US" dirty="0"/>
           </a:p>
@@ -1166,6 +1167,95 @@
             <a:fld id="{F7021451-1387-4CA6-816F-3879F97B5CBC}" type="slidenum">
               <a:rPr lang="en-US"/>
               <a:t>16</a:t>
+            </a:fld>
+            <a:endParaRPr lang="en-US"/>
+          </a:p>
+        </p:txBody>
+      </p:sp>
+    </p:spTree>
+    <p:extLst>
+      <p:ext uri="{BB962C8B-B14F-4D97-AF65-F5344CB8AC3E}">
+        <p14:creationId xmlns:p14="http://schemas.microsoft.com/office/powerpoint/2010/main" val="1024086991"/>
+      </p:ext>
+    </p:extLst>
+  </p:cSld>
+  <p:clrMapOvr>
+    <a:masterClrMapping/>
+  </p:clrMapOvr>
+</p:notes>
+</file>
+
+<file path=ppt/notesSlides/notesSlide17.xml><?xml version="1.0" encoding="utf-8"?>
+<p:notes xmlns:a="http://schemas.openxmlformats.org/drawingml/2006/main" xmlns:r="http://schemas.openxmlformats.org/officeDocument/2006/relationships" xmlns:p="http://schemas.openxmlformats.org/presentationml/2006/main">
+  <p:cSld>
+    <p:spTree>
+      <p:nvGrpSpPr>
+        <p:cNvPr id="1" name=""/>
+        <p:cNvGrpSpPr/>
+        <p:nvPr/>
+      </p:nvGrpSpPr>
+      <p:grpSpPr>
+        <a:xfrm>
+          <a:off x="0" y="0"/>
+          <a:ext cx="0" cy="0"/>
+          <a:chOff x="0" y="0"/>
+          <a:chExt cx="0" cy="0"/>
+        </a:xfrm>
+      </p:grpSpPr>
+      <p:sp>
+        <p:nvSpPr>
+          <p:cNvPr id="2" name="Slide Image Placeholder 1"/>
+          <p:cNvSpPr>
+            <a:spLocks noGrp="1" noRot="1" noChangeAspect="1"/>
+          </p:cNvSpPr>
+          <p:nvPr>
+            <p:ph type="sldImg"/>
+          </p:nvPr>
+        </p:nvSpPr>
+        <p:spPr/>
+      </p:sp>
+      <p:sp>
+        <p:nvSpPr>
+          <p:cNvPr id="3" name="Notes Placeholder 2"/>
+          <p:cNvSpPr>
+            <a:spLocks noGrp="1"/>
+          </p:cNvSpPr>
+          <p:nvPr>
+            <p:ph type="body" idx="1"/>
+          </p:nvPr>
+        </p:nvSpPr>
+        <p:spPr/>
+        <p:txBody>
+          <a:bodyPr/>
+          <a:lstStyle/>
+          <a:p>
+            <a:r>
+              <a:rPr lang="en-US" dirty="0"/>
+              <a:t>• Ask attendees which pattern the lab's Planner/Retriever/Critic revision loop maps to. The honest answer, per Module 3: none of them directly — Sequential can't loop back, so the lab builds a custom graph. That's the bridge into Module 3.
+• GROUNDING SOURCE: https://learn.microsoft.com/en-us/agent-framework/workflows/orchestrations/</a:t>
+            </a:r>
+            <a:endParaRPr lang="en-US" dirty="0"/>
+          </a:p>
+        </p:txBody>
+      </p:sp>
+      <p:sp>
+        <p:nvSpPr>
+          <p:cNvPr id="4" name="Slide Number Placeholder 3"/>
+          <p:cNvSpPr>
+            <a:spLocks noGrp="1"/>
+          </p:cNvSpPr>
+          <p:nvPr>
+            <p:ph type="sldNum" sz="quarter" idx="10"/>
+          </p:nvPr>
+        </p:nvSpPr>
+        <p:spPr/>
+        <p:txBody>
+          <a:bodyPr/>
+          <a:lstStyle/>
+          <a:p>
+            <a:fld id="{F7021451-1387-4CA6-816F-3879F97B5CBC}" type="slidenum">
+              <a:rPr lang="en-US"/>
+              <a:t>17</a:t>
             </a:fld>
             <a:endParaRPr lang="en-US"/>
           </a:p>
@@ -1675,8 +1765,8 @@
           <a:p>
             <a:r>
               <a:rPr lang="en-US" dirty="0"/>
-              <a:t>• This is the framework's own contrast, worth dwelling on since Module 1 already covered agents-as-tools — attendees will otherwise conflate the two. Handoff has no central orchestrator; agents connect directly in a mesh so every agent shares context with every other.
-• GROUNDING SOURCE: https://learn.microsoft.com/en-us/agent-framework/workflows/orchestrations/handoff</a:t>
+              <a:t>• Placeholder marker slide — the runbook has full narration, setup, and fallback plan. Grounded in the official concurrent_agents.py sample (same researcher/marketer/legal agents and eBike prompt), adapted with a timing middleware and a sequential comparison to prove the overlap live instead of asserting it.
+• GROUNDING SOURCE: https://github.com/microsoft/agent-framework/blob/main/python/samples/03-workflows/orchestrations/concurrent_agents.py</a:t>
             </a:r>
             <a:endParaRPr lang="en-US" dirty="0"/>
           </a:p>
@@ -1764,7 +1854,7 @@
           <a:p>
             <a:r>
               <a:rPr lang="en-US" dirty="0"/>
-              <a:t>• A dedicated shape slide, separate from the previous compare slide's agents-as-tools contrast — Handoff's mesh topology (every agent connects to every other, no central orchestrator) is easiest to see as a picture rather than another bullet. Diagram reproduced verbatim from the official Handoff orchestration Learn page.
+              <a:t>• This is the framework's own contrast, worth dwelling on since Module 1 already covered agents-as-tools — attendees will otherwise conflate the two. Handoff has no central orchestrator; agents connect directly in a mesh so every agent shares context with every other.
 • GROUNDING SOURCE: https://learn.microsoft.com/en-us/agent-framework/workflows/orchestrations/handoff</a:t>
             </a:r>
             <a:endParaRPr lang="en-US" dirty="0"/>
@@ -1853,7 +1943,7 @@
           <a:p>
             <a:r>
               <a:rPr lang="en-US" dirty="0"/>
-              <a:t>• add_handoff restricts routing (by default every agent can hand off to every other); the mesh topology for context-sharing stays intact regardless — restricting handoff rules only governs who can take over next, not who sees the conversation. Interactive by default: when an agent responds without handing off, control returns to the user for the next input.
+              <a:t>• A dedicated shape slide, separate from the previous compare slide's agents-as-tools contrast — Handoff's mesh topology (every agent connects to every other, no central orchestrator) is easiest to see as a picture rather than another bullet. Diagram reproduced verbatim from the official Handoff orchestration Learn page.
 • GROUNDING SOURCE: https://learn.microsoft.com/en-us/agent-framework/workflows/orchestrations/handoff</a:t>
             </a:r>
             <a:endParaRPr lang="en-US" dirty="0"/>
@@ -2567,7 +2657,7 @@
               <a:buNone/>
             </a:pPr>
             <a:r>
-              <a:rPr lang="en-US" sz="2500" b="1" dirty="0">
+              <a:rPr lang="en-US" sz="2800" b="1" dirty="0">
                 <a:solidFill>
                   <a:srgbClr val="1E2761"/>
                 </a:solidFill>
@@ -2575,22 +2665,47 @@
                 <a:ea typeface="Calibri" pitchFamily="34" charset="-122"/>
                 <a:cs typeface="Calibri" pitchFamily="34" charset="-120"/>
               </a:rPr>
-              <a:t>Group Chat — a coordinated conversation</a:t>
-            </a:r>
-            <a:endParaRPr lang="en-US" sz="2500" dirty="0"/>
-          </a:p>
-        </p:txBody>
-      </p:sp>
-      <p:sp>
-        <p:nvSpPr>
-          <p:cNvPr id="5" name="Text 3"/>
-          <p:cNvSpPr/>
-          <p:nvPr/>
-        </p:nvSpPr>
-        <p:spPr>
-          <a:xfrm>
-            <a:off x="365760" y="1078992"/>
-            <a:ext cx="4023360" cy="3630168"/>
+              <a:t>Handoff in code</a:t>
+            </a:r>
+            <a:endParaRPr lang="en-US" sz="2800" dirty="0"/>
+          </a:p>
+        </p:txBody>
+      </p:sp>
+      <p:sp>
+        <p:nvSpPr>
+          <p:cNvPr id="5" name="Shape 3"/>
+          <p:cNvSpPr/>
+          <p:nvPr/>
+        </p:nvSpPr>
+        <p:spPr>
+          <a:xfrm>
+            <a:off x="365760" y="1115568"/>
+            <a:ext cx="8412480" cy="2888234"/>
+          </a:xfrm>
+          <a:prstGeom prst="rect">
+            <a:avLst/>
+          </a:prstGeom>
+          <a:solidFill>
+            <a:srgbClr val="1D1E22"/>
+          </a:solidFill>
+          <a:ln w="9525">
+            <a:solidFill>
+              <a:srgbClr val="2A2B2E"/>
+            </a:solidFill>
+            <a:prstDash val="solid"/>
+          </a:ln>
+        </p:spPr>
+      </p:sp>
+      <p:sp>
+        <p:nvSpPr>
+          <p:cNvPr id="6" name="Text 4"/>
+          <p:cNvSpPr/>
+          <p:nvPr/>
+        </p:nvSpPr>
+        <p:spPr>
+          <a:xfrm>
+            <a:off x="502920" y="1207008"/>
+            <a:ext cx="8138160" cy="2705354"/>
           </a:xfrm>
           <a:prstGeom prst="rect">
             <a:avLst/>
@@ -2604,118 +2719,317 @@
           </a:bodyPr>
           <a:lstStyle/>
           <a:p>
-            <a:pPr marL="342900" indent="-342900">
+            <a:pPr indent="0" marL="0">
+              <a:buNone/>
+            </a:pPr>
+            <a:r>
+              <a:rPr lang="en-US" sz="1280" dirty="0">
+                <a:solidFill>
+                  <a:srgbClr val="A996B6"/>
+                </a:solidFill>
+                <a:latin typeface="Consolas" pitchFamily="34" charset="0"/>
+                <a:ea typeface="Consolas" pitchFamily="34" charset="-122"/>
+                <a:cs typeface="Consolas" pitchFamily="34" charset="-120"/>
+              </a:rPr>
+              <a:t>from</a:t>
+            </a:r>
+            <a:pPr indent="0" marL="0">
+              <a:buNone/>
+            </a:pPr>
+            <a:r>
+              <a:rPr lang="en-US" sz="1280" dirty="0">
+                <a:solidFill>
+                  <a:srgbClr val="FFFFFF"/>
+                </a:solidFill>
+                <a:latin typeface="Consolas" pitchFamily="34" charset="0"/>
+                <a:ea typeface="Consolas" pitchFamily="34" charset="-122"/>
+                <a:cs typeface="Consolas" pitchFamily="34" charset="-120"/>
+              </a:rPr>
+              <a:t> agent_framework.orchestrations </a:t>
+            </a:r>
+            <a:pPr indent="0" marL="0">
+              <a:buNone/>
+            </a:pPr>
+            <a:r>
+              <a:rPr lang="en-US" sz="1280" dirty="0">
+                <a:solidFill>
+                  <a:srgbClr val="A996B6"/>
+                </a:solidFill>
+                <a:latin typeface="Consolas" pitchFamily="34" charset="0"/>
+                <a:ea typeface="Consolas" pitchFamily="34" charset="-122"/>
+                <a:cs typeface="Consolas" pitchFamily="34" charset="-120"/>
+              </a:rPr>
+              <a:t>import</a:t>
+            </a:r>
+            <a:pPr indent="0" marL="0">
+              <a:buNone/>
+            </a:pPr>
+            <a:r>
+              <a:rPr lang="en-US" sz="1280" dirty="0">
+                <a:solidFill>
+                  <a:srgbClr val="FFFFFF"/>
+                </a:solidFill>
+                <a:latin typeface="Consolas" pitchFamily="34" charset="0"/>
+                <a:ea typeface="Consolas" pitchFamily="34" charset="-122"/>
+                <a:cs typeface="Consolas" pitchFamily="34" charset="-120"/>
+              </a:rPr>
+              <a:t> HandoffBuilder</a:t>
+            </a:r>
+            <a:endParaRPr lang="en-US" sz="1280" dirty="0"/>
+          </a:p>
+          <a:p>
+            <a:pPr indent="0" marL="0">
+              <a:buNone/>
+            </a:pPr>
+            <a:endParaRPr lang="en-US" sz="1280" dirty="0"/>
+          </a:p>
+          <a:p>
+            <a:pPr indent="0" marL="0">
+              <a:buNone/>
+            </a:pPr>
+            <a:r>
+              <a:rPr lang="en-US" sz="1280" dirty="0">
+                <a:solidFill>
+                  <a:srgbClr val="FFFFFF"/>
+                </a:solidFill>
+                <a:latin typeface="Consolas" pitchFamily="34" charset="0"/>
+                <a:ea typeface="Consolas" pitchFamily="34" charset="-122"/>
+                <a:cs typeface="Consolas" pitchFamily="34" charset="-120"/>
+              </a:rPr>
+              <a:t>workflow = (</a:t>
+            </a:r>
+            <a:endParaRPr lang="en-US" sz="1280" dirty="0"/>
+          </a:p>
+          <a:p>
+            <a:pPr indent="0" marL="0">
+              <a:buNone/>
+            </a:pPr>
+            <a:r>
+              <a:rPr lang="en-US" sz="1280" dirty="0">
+                <a:solidFill>
+                  <a:srgbClr val="FFFFFF"/>
+                </a:solidFill>
+                <a:latin typeface="Consolas" pitchFamily="34" charset="0"/>
+                <a:ea typeface="Consolas" pitchFamily="34" charset="-122"/>
+                <a:cs typeface="Consolas" pitchFamily="34" charset="-120"/>
+              </a:rPr>
+              <a:t>    HandoffBuilder(</a:t>
+            </a:r>
+            <a:endParaRPr lang="en-US" sz="1280" dirty="0"/>
+          </a:p>
+          <a:p>
+            <a:pPr indent="0" marL="0">
+              <a:buNone/>
+            </a:pPr>
+            <a:r>
+              <a:rPr lang="en-US" sz="1280" dirty="0">
+                <a:solidFill>
+                  <a:srgbClr val="FFFFFF"/>
+                </a:solidFill>
+                <a:latin typeface="Consolas" pitchFamily="34" charset="0"/>
+                <a:ea typeface="Consolas" pitchFamily="34" charset="-122"/>
+                <a:cs typeface="Consolas" pitchFamily="34" charset="-120"/>
+              </a:rPr>
+              <a:t>        name=</a:t>
+            </a:r>
+            <a:pPr indent="0" marL="0">
+              <a:buNone/>
+            </a:pPr>
+            <a:r>
+              <a:rPr lang="en-US" sz="1280" dirty="0">
+                <a:solidFill>
+                  <a:srgbClr val="E4C98A"/>
+                </a:solidFill>
+                <a:latin typeface="Consolas" pitchFamily="34" charset="0"/>
+                <a:ea typeface="Consolas" pitchFamily="34" charset="-122"/>
+                <a:cs typeface="Consolas" pitchFamily="34" charset="-120"/>
+              </a:rPr>
+              <a:t>"customer_support"</a:t>
+            </a:r>
+            <a:pPr indent="0" marL="0">
+              <a:buNone/>
+            </a:pPr>
+            <a:r>
+              <a:rPr lang="en-US" sz="1280" dirty="0">
+                <a:solidFill>
+                  <a:srgbClr val="FFFFFF"/>
+                </a:solidFill>
+                <a:latin typeface="Consolas" pitchFamily="34" charset="0"/>
+                <a:ea typeface="Consolas" pitchFamily="34" charset="-122"/>
+                <a:cs typeface="Consolas" pitchFamily="34" charset="-120"/>
+              </a:rPr>
+              <a:t>,</a:t>
+            </a:r>
+            <a:endParaRPr lang="en-US" sz="1280" dirty="0"/>
+          </a:p>
+          <a:p>
+            <a:pPr indent="0" marL="0">
+              <a:buNone/>
+            </a:pPr>
+            <a:r>
+              <a:rPr lang="en-US" sz="1280" dirty="0">
+                <a:solidFill>
+                  <a:srgbClr val="FFFFFF"/>
+                </a:solidFill>
+                <a:latin typeface="Consolas" pitchFamily="34" charset="0"/>
+                <a:ea typeface="Consolas" pitchFamily="34" charset="-122"/>
+                <a:cs typeface="Consolas" pitchFamily="34" charset="-120"/>
+              </a:rPr>
+              <a:t>        participants=[triage_agent, refund_agent, order_agent, return_agent],</a:t>
+            </a:r>
+            <a:endParaRPr lang="en-US" sz="1280" dirty="0"/>
+          </a:p>
+          <a:p>
+            <a:pPr indent="0" marL="0">
+              <a:buNone/>
+            </a:pPr>
+            <a:r>
+              <a:rPr lang="en-US" sz="1280" dirty="0">
+                <a:solidFill>
+                  <a:srgbClr val="FFFFFF"/>
+                </a:solidFill>
+                <a:latin typeface="Consolas" pitchFamily="34" charset="0"/>
+                <a:ea typeface="Consolas" pitchFamily="34" charset="-122"/>
+                <a:cs typeface="Consolas" pitchFamily="34" charset="-120"/>
+              </a:rPr>
+              <a:t>    )</a:t>
+            </a:r>
+            <a:endParaRPr lang="en-US" sz="1280" dirty="0"/>
+          </a:p>
+          <a:p>
+            <a:pPr indent="0" marL="0">
+              <a:buNone/>
+            </a:pPr>
+            <a:r>
+              <a:rPr lang="en-US" sz="1280" dirty="0">
+                <a:solidFill>
+                  <a:srgbClr val="FFFFFF"/>
+                </a:solidFill>
+                <a:latin typeface="Consolas" pitchFamily="34" charset="0"/>
+                <a:ea typeface="Consolas" pitchFamily="34" charset="-122"/>
+                <a:cs typeface="Consolas" pitchFamily="34" charset="-120"/>
+              </a:rPr>
+              <a:t>    .with_start_agent(triage_agent)</a:t>
+            </a:r>
+            <a:endParaRPr lang="en-US" sz="1280" dirty="0"/>
+          </a:p>
+          <a:p>
+            <a:pPr indent="0" marL="0">
+              <a:buNone/>
+            </a:pPr>
+            <a:r>
+              <a:rPr lang="en-US" sz="1280" dirty="0">
+                <a:solidFill>
+                  <a:srgbClr val="FFFFFF"/>
+                </a:solidFill>
+                <a:latin typeface="Consolas" pitchFamily="34" charset="0"/>
+                <a:ea typeface="Consolas" pitchFamily="34" charset="-122"/>
+                <a:cs typeface="Consolas" pitchFamily="34" charset="-120"/>
+              </a:rPr>
+              <a:t>    .add_handoff(triage_agent, [order_agent, return_agent])</a:t>
+            </a:r>
+            <a:endParaRPr lang="en-US" sz="1280" dirty="0"/>
+          </a:p>
+          <a:p>
+            <a:pPr indent="0" marL="0">
+              <a:buNone/>
+            </a:pPr>
+            <a:r>
+              <a:rPr lang="en-US" sz="1280" dirty="0">
+                <a:solidFill>
+                  <a:srgbClr val="FFFFFF"/>
+                </a:solidFill>
+                <a:latin typeface="Consolas" pitchFamily="34" charset="0"/>
+                <a:ea typeface="Consolas" pitchFamily="34" charset="-122"/>
+                <a:cs typeface="Consolas" pitchFamily="34" charset="-120"/>
+              </a:rPr>
+              <a:t>    .add_handoff(return_agent, [refund_agent])</a:t>
+            </a:r>
+            <a:endParaRPr lang="en-US" sz="1280" dirty="0"/>
+          </a:p>
+          <a:p>
+            <a:pPr indent="0" marL="0">
+              <a:buNone/>
+            </a:pPr>
+            <a:r>
+              <a:rPr lang="en-US" sz="1280" dirty="0">
+                <a:solidFill>
+                  <a:srgbClr val="FFFFFF"/>
+                </a:solidFill>
+                <a:latin typeface="Consolas" pitchFamily="34" charset="0"/>
+                <a:ea typeface="Consolas" pitchFamily="34" charset="-122"/>
+                <a:cs typeface="Consolas" pitchFamily="34" charset="-120"/>
+              </a:rPr>
+              <a:t>    .build()</a:t>
+            </a:r>
+            <a:endParaRPr lang="en-US" sz="1280" dirty="0"/>
+          </a:p>
+          <a:p>
+            <a:pPr indent="0" marL="0">
+              <a:buNone/>
+            </a:pPr>
+            <a:r>
+              <a:rPr lang="en-US" sz="1280" dirty="0">
+                <a:solidFill>
+                  <a:srgbClr val="FFFFFF"/>
+                </a:solidFill>
+                <a:latin typeface="Consolas" pitchFamily="34" charset="0"/>
+                <a:ea typeface="Consolas" pitchFamily="34" charset="-122"/>
+                <a:cs typeface="Consolas" pitchFamily="34" charset="-120"/>
+              </a:rPr>
+              <a:t>)</a:t>
+            </a:r>
+            <a:endParaRPr lang="en-US" sz="1280" dirty="0"/>
+          </a:p>
+        </p:txBody>
+      </p:sp>
+      <p:sp>
+        <p:nvSpPr>
+          <p:cNvPr id="7" name="Text 5"/>
+          <p:cNvSpPr/>
+          <p:nvPr/>
+        </p:nvSpPr>
+        <p:spPr>
+          <a:xfrm>
+            <a:off x="365760" y="4131818"/>
+            <a:ext cx="8412480" cy="577342"/>
+          </a:xfrm>
+          <a:prstGeom prst="rect">
+            <a:avLst/>
+          </a:prstGeom>
+          <a:noFill/>
+          <a:ln/>
+        </p:spPr>
+        <p:txBody>
+          <a:bodyPr wrap="square" lIns="0" tIns="0" rIns="0" bIns="0" rtlCol="0" anchor="t">
+            <a:normAutofit/>
+          </a:bodyPr>
+          <a:lstStyle/>
+          <a:p>
+            <a:pPr indent="0" marL="0">
               <a:spcAft>
-                <a:spcPts val="1000"/>
+                <a:spcPts val="800"/>
               </a:spcAft>
-              <a:buSzPct val="100000"/>
-              <a:buChar char="•"/>
-            </a:pPr>
-            <a:r>
-              <a:rPr lang="en-US" sz="1600" dirty="0">
-                <a:solidFill>
-                  <a:srgbClr val="212121"/>
+              <a:buNone/>
+            </a:pPr>
+            <a:r>
+              <a:rPr lang="en-US" sz="1300" dirty="0">
+                <a:solidFill>
+                  <a:srgbClr val="6B7280"/>
                 </a:solidFill>
                 <a:latin typeface="Calibri" pitchFamily="34" charset="0"/>
                 <a:ea typeface="Calibri" pitchFamily="34" charset="-122"/>
                 <a:cs typeface="Calibri" pitchFamily="34" charset="-120"/>
               </a:rPr>
-              <a:t>Star topology: an orchestrator in the middle selects who speaks next (round-robin, prompt-based, or custom logic)</a:t>
-            </a:r>
-            <a:endParaRPr lang="en-US" sz="1600" dirty="0"/>
-          </a:p>
-          <a:p>
-            <a:pPr marL="342900" indent="-342900">
-              <a:spcAft>
-                <a:spcPts val="1000"/>
-              </a:spcAft>
-              <a:buSzPct val="100000"/>
-              <a:buChar char="•"/>
-            </a:pPr>
-            <a:r>
-              <a:rPr lang="en-US" sz="1600" dirty="0">
-                <a:solidFill>
-                  <a:srgbClr val="212121"/>
-                </a:solidFill>
-                <a:latin typeface="Calibri" pitchFamily="34" charset="0"/>
-                <a:ea typeface="Calibri" pitchFamily="34" charset="-122"/>
-                <a:cs typeface="Calibri" pitchFamily="34" charset="-120"/>
-              </a:rPr>
-              <a:t>Agents can review and build on each other's responses across multiple rounds</a:t>
-            </a:r>
-            <a:endParaRPr lang="en-US" sz="1600" dirty="0"/>
-          </a:p>
-          <a:p>
-            <a:pPr marL="342900" indent="-342900">
-              <a:spcAft>
-                <a:spcPts val="1000"/>
-              </a:spcAft>
-              <a:buSzPct val="100000"/>
-              <a:buChar char="•"/>
-            </a:pPr>
-            <a:r>
-              <a:rPr lang="en-US" sz="1600" dirty="0">
-                <a:solidFill>
-                  <a:srgbClr val="212121"/>
-                </a:solidFill>
-                <a:latin typeface="Calibri" pitchFamily="34" charset="0"/>
-                <a:ea typeface="Calibri" pitchFamily="34" charset="-122"/>
-                <a:cs typeface="Calibri" pitchFamily="34" charset="-120"/>
-              </a:rPr>
-              <a:t>Context Synchronization: agents do NOT share one AgentSession instance — the orchestrator broadcasts each response so every agent's own session stays current before its next turn</a:t>
-            </a:r>
-            <a:endParaRPr lang="en-US" sz="1600" dirty="0"/>
-          </a:p>
-          <a:p>
-            <a:pPr marL="342900" indent="-342900">
-              <a:spcAft>
-                <a:spcPts val="1000"/>
-              </a:spcAft>
-              <a:buSzPct val="100000"/>
-              <a:buChar char="•"/>
-            </a:pPr>
-            <a:r>
-              <a:rPr lang="en-US" sz="1600" dirty="0">
-                <a:solidFill>
-                  <a:srgbClr val="212121"/>
-                </a:solidFill>
-                <a:latin typeface="Calibri" pitchFamily="34" charset="0"/>
-                <a:ea typeface="Calibri" pitchFamily="34" charset="-122"/>
-                <a:cs typeface="Calibri" pitchFamily="34" charset="-120"/>
-              </a:rPr>
-              <a:t>Bounded by a maximum round/iteration count</a:t>
-            </a:r>
-            <a:endParaRPr lang="en-US" sz="1600" dirty="0"/>
-          </a:p>
-        </p:txBody>
-      </p:sp>
-      <p:pic>
-        <p:nvPicPr>
-          <p:cNvPr id="6" name="Image 0" descr="[object Object]">    </p:cNvPr>
-          <p:cNvPicPr>
-            <a:picLocks noChangeAspect="1"/>
-          </p:cNvPicPr>
-          <p:nvPr/>
-        </p:nvPicPr>
-        <p:blipFill>
-          <a:blip r:embed="rId1"/>
-          <a:stretch>
-            <a:fillRect/>
-          </a:stretch>
-        </p:blipFill>
-        <p:spPr>
-          <a:xfrm>
-            <a:off x="4663440" y="1788529"/>
-            <a:ext cx="4114800" cy="2211094"/>
-          </a:xfrm>
-          <a:prstGeom prst="rect">
-            <a:avLst/>
-          </a:prstGeom>
-        </p:spPr>
-      </p:pic>
-      <p:sp>
-        <p:nvSpPr>
-          <p:cNvPr id="7" name="Shape 4"/>
+              <a:t>Handoff is interactive by default — when an agent responds without handing off, control returns to the user for the next input.</a:t>
+            </a:r>
+            <a:endParaRPr lang="en-US" sz="1300" dirty="0"/>
+          </a:p>
+        </p:txBody>
+      </p:sp>
+      <p:sp>
+        <p:nvSpPr>
+          <p:cNvPr id="8" name="Shape 6"/>
           <p:cNvSpPr/>
           <p:nvPr/>
         </p:nvSpPr>
@@ -2738,7 +3052,7 @@
       </p:sp>
       <p:sp>
         <p:nvSpPr>
-          <p:cNvPr id="8" name="Text 5"/>
+          <p:cNvPr id="9" name="Text 7"/>
           <p:cNvSpPr/>
           <p:nvPr/>
         </p:nvSpPr>
@@ -2771,7 +3085,7 @@
                 <a:ea typeface="Calibri" pitchFamily="34" charset="-122"/>
                 <a:cs typeface="Calibri" pitchFamily="34" charset="-120"/>
               </a:rPr>
-              <a:t>Source: https://learn.microsoft.com/en-us/agent-framework/workflows/orchestrations/group-chat</a:t>
+              <a:t>Source: https://learn.microsoft.com/en-us/agent-framework/workflows/orchestrations/handoff</a:t>
             </a:r>
             <a:endParaRPr lang="en-US" sz="820" dirty="0"/>
           </a:p>
@@ -2897,7 +3211,7 @@
               <a:buNone/>
             </a:pPr>
             <a:r>
-              <a:rPr lang="en-US" sz="2800" b="1" dirty="0">
+              <a:rPr lang="en-US" sz="2500" b="1" dirty="0">
                 <a:solidFill>
                   <a:srgbClr val="1E2761"/>
                 </a:solidFill>
@@ -2905,47 +3219,22 @@
                 <a:ea typeface="Calibri" pitchFamily="34" charset="-122"/>
                 <a:cs typeface="Calibri" pitchFamily="34" charset="-120"/>
               </a:rPr>
-              <a:t>When to use Group Chat</a:t>
-            </a:r>
-            <a:endParaRPr lang="en-US" sz="2800" dirty="0"/>
-          </a:p>
-        </p:txBody>
-      </p:sp>
-      <p:sp>
-        <p:nvSpPr>
-          <p:cNvPr id="5" name="Shape 3"/>
+              <a:t>Group Chat — a coordinated conversation</a:t>
+            </a:r>
+            <a:endParaRPr lang="en-US" sz="2500" dirty="0"/>
+          </a:p>
+        </p:txBody>
+      </p:sp>
+      <p:sp>
+        <p:nvSpPr>
+          <p:cNvPr id="5" name="Text 3"/>
           <p:cNvSpPr/>
           <p:nvPr/>
         </p:nvSpPr>
         <p:spPr>
           <a:xfrm>
             <a:off x="365760" y="1078992"/>
-            <a:ext cx="4114800" cy="3493008"/>
-          </a:xfrm>
-          <a:prstGeom prst="roundRect">
-            <a:avLst/>
-          </a:prstGeom>
-          <a:solidFill>
-            <a:srgbClr val="F3F4F6"/>
-          </a:solidFill>
-          <a:ln w="11430">
-            <a:solidFill>
-              <a:srgbClr val="D1D5DB"/>
-            </a:solidFill>
-            <a:prstDash val="solid"/>
-          </a:ln>
-        </p:spPr>
-      </p:sp>
-      <p:sp>
-        <p:nvSpPr>
-          <p:cNvPr id="6" name="Text 4"/>
-          <p:cNvSpPr/>
-          <p:nvPr/>
-        </p:nvSpPr>
-        <p:spPr>
-          <a:xfrm>
-            <a:off x="566928" y="1298448"/>
-            <a:ext cx="3712464" cy="411480"/>
+            <a:ext cx="4023360" cy="3630168"/>
           </a:xfrm>
           <a:prstGeom prst="rect">
             <a:avLst/>
@@ -2954,58 +3243,41 @@
           <a:ln/>
         </p:spPr>
         <p:txBody>
-          <a:bodyPr wrap="square" lIns="0" tIns="0" rIns="0" bIns="0" rtlCol="0" anchor="ctr">
+          <a:bodyPr wrap="square" lIns="0" tIns="0" rIns="0" bIns="0" rtlCol="0" anchor="t">
             <a:normAutofit/>
           </a:bodyPr>
           <a:lstStyle/>
           <a:p>
-            <a:pPr indent="0" marL="0">
-              <a:buNone/>
-            </a:pPr>
-            <a:r>
-              <a:rPr lang="en-US" sz="2000" b="1" dirty="0">
-                <a:solidFill>
-                  <a:srgbClr val="1E2761"/>
+            <a:pPr marL="342900" indent="-342900">
+              <a:spcAft>
+                <a:spcPts val="1000"/>
+              </a:spcAft>
+              <a:buSzPct val="100000"/>
+              <a:buChar char="•"/>
+            </a:pPr>
+            <a:r>
+              <a:rPr lang="en-US" sz="1600" dirty="0">
+                <a:solidFill>
+                  <a:srgbClr val="212121"/>
                 </a:solidFill>
                 <a:latin typeface="Calibri" pitchFamily="34" charset="0"/>
                 <a:ea typeface="Calibri" pitchFamily="34" charset="-122"/>
                 <a:cs typeface="Calibri" pitchFamily="34" charset="-120"/>
               </a:rPr>
-              <a:t>Good fit</a:t>
-            </a:r>
-            <a:endParaRPr lang="en-US" sz="2000" dirty="0"/>
-          </a:p>
-        </p:txBody>
-      </p:sp>
-      <p:sp>
-        <p:nvSpPr>
-          <p:cNvPr id="7" name="Text 5"/>
-          <p:cNvSpPr/>
-          <p:nvPr/>
-        </p:nvSpPr>
-        <p:spPr>
-          <a:xfrm>
-            <a:off x="594360" y="1828800"/>
-            <a:ext cx="3639312" cy="2395728"/>
-          </a:xfrm>
-          <a:prstGeom prst="rect">
-            <a:avLst/>
-          </a:prstGeom>
-          <a:noFill/>
-          <a:ln/>
-        </p:spPr>
-        <p:txBody>
-          <a:bodyPr wrap="square" lIns="381" tIns="381" rIns="381" bIns="381" rtlCol="0" anchor="ctr">
-            <a:normAutofit/>
-          </a:bodyPr>
-          <a:lstStyle/>
+              <a:t>Star topology: an orchestrator in the middle selects who speaks next (round-robin, prompt-based, or custom logic)</a:t>
+            </a:r>
+            <a:endParaRPr lang="en-US" sz="1600" dirty="0"/>
+          </a:p>
           <a:p>
             <a:pPr marL="342900" indent="-342900">
+              <a:spcAft>
+                <a:spcPts val="1000"/>
+              </a:spcAft>
               <a:buSzPct val="100000"/>
               <a:buChar char="•"/>
             </a:pPr>
             <a:r>
-              <a:rPr lang="en-US" sz="1300" dirty="0">
+              <a:rPr lang="en-US" sz="1600" dirty="0">
                 <a:solidFill>
                   <a:srgbClr val="212121"/>
                 </a:solidFill>
@@ -3013,17 +3285,20 @@
                 <a:ea typeface="Calibri" pitchFamily="34" charset="-122"/>
                 <a:cs typeface="Calibri" pitchFamily="34" charset="-120"/>
               </a:rPr>
-              <a:t>Iterative refinement across multiple rounds</a:t>
-            </a:r>
-            <a:endParaRPr lang="en-US" sz="1300" dirty="0"/>
+              <a:t>Agents can review and build on each other's responses across multiple rounds</a:t>
+            </a:r>
+            <a:endParaRPr lang="en-US" sz="1600" dirty="0"/>
           </a:p>
           <a:p>
             <a:pPr marL="342900" indent="-342900">
+              <a:spcAft>
+                <a:spcPts val="1000"/>
+              </a:spcAft>
               <a:buSzPct val="100000"/>
               <a:buChar char="•"/>
             </a:pPr>
             <a:r>
-              <a:rPr lang="en-US" sz="1300" dirty="0">
+              <a:rPr lang="en-US" sz="1600" dirty="0">
                 <a:solidFill>
                   <a:srgbClr val="212121"/>
                 </a:solidFill>
@@ -3031,17 +3306,20 @@
                 <a:ea typeface="Calibri" pitchFamily="34" charset="-122"/>
                 <a:cs typeface="Calibri" pitchFamily="34" charset="-120"/>
               </a:rPr>
-              <a:t>Collaborative problem-solving, multi-perspective analysis</a:t>
-            </a:r>
-            <a:endParaRPr lang="en-US" sz="1300" dirty="0"/>
+              <a:t>Context Synchronization: agents do NOT share one AgentSession instance — the orchestrator broadcasts each response so every agent's own session stays current before its next turn</a:t>
+            </a:r>
+            <a:endParaRPr lang="en-US" sz="1600" dirty="0"/>
           </a:p>
           <a:p>
             <a:pPr marL="342900" indent="-342900">
+              <a:spcAft>
+                <a:spcPts val="1000"/>
+              </a:spcAft>
               <a:buSzPct val="100000"/>
               <a:buChar char="•"/>
             </a:pPr>
             <a:r>
-              <a:rPr lang="en-US" sz="1300" dirty="0">
+              <a:rPr lang="en-US" sz="1600" dirty="0">
                 <a:solidFill>
                   <a:srgbClr val="212121"/>
                 </a:solidFill>
@@ -3049,177 +3327,39 @@
                 <a:ea typeface="Calibri" pitchFamily="34" charset="-122"/>
                 <a:cs typeface="Calibri" pitchFamily="34" charset="-120"/>
               </a:rPr>
-              <a:t>Writer-reviewer content creation</a:t>
-            </a:r>
-            <a:endParaRPr lang="en-US" sz="1300" dirty="0"/>
-          </a:p>
-        </p:txBody>
-      </p:sp>
-      <p:sp>
-        <p:nvSpPr>
-          <p:cNvPr id="8" name="Shape 6"/>
-          <p:cNvSpPr/>
-          <p:nvPr/>
-        </p:nvSpPr>
-        <p:spPr>
-          <a:xfrm>
-            <a:off x="4663440" y="1078992"/>
-            <a:ext cx="4114800" cy="3493008"/>
-          </a:xfrm>
-          <a:prstGeom prst="roundRect">
-            <a:avLst/>
-          </a:prstGeom>
-          <a:solidFill>
-            <a:srgbClr val="CADCFC"/>
-          </a:solidFill>
-          <a:ln w="11430">
-            <a:solidFill>
-              <a:srgbClr val="1E2761"/>
-            </a:solidFill>
-            <a:prstDash val="solid"/>
-          </a:ln>
-        </p:spPr>
-      </p:sp>
-      <p:sp>
-        <p:nvSpPr>
-          <p:cNvPr id="9" name="Text 7"/>
-          <p:cNvSpPr/>
-          <p:nvPr/>
-        </p:nvSpPr>
-        <p:spPr>
-          <a:xfrm>
-            <a:off x="4864608" y="1298448"/>
-            <a:ext cx="3712464" cy="411480"/>
-          </a:xfrm>
-          <a:prstGeom prst="rect">
-            <a:avLst/>
-          </a:prstGeom>
-          <a:noFill/>
-          <a:ln/>
-        </p:spPr>
-        <p:txBody>
-          <a:bodyPr wrap="square" lIns="0" tIns="0" rIns="0" bIns="0" rtlCol="0" anchor="ctr">
-            <a:normAutofit/>
-          </a:bodyPr>
-          <a:lstStyle/>
-          <a:p>
-            <a:pPr indent="0" marL="0">
-              <a:buNone/>
-            </a:pPr>
-            <a:r>
-              <a:rPr lang="en-US" sz="2000" b="1" dirty="0">
-                <a:solidFill>
-                  <a:srgbClr val="1E2761"/>
-                </a:solidFill>
-                <a:latin typeface="Calibri" pitchFamily="34" charset="0"/>
-                <a:ea typeface="Calibri" pitchFamily="34" charset="-122"/>
-                <a:cs typeface="Calibri" pitchFamily="34" charset="-120"/>
-              </a:rPr>
-              <a:t>Consider an alternative when</a:t>
-            </a:r>
-            <a:endParaRPr lang="en-US" sz="2000" dirty="0"/>
-          </a:p>
-        </p:txBody>
-      </p:sp>
-      <p:sp>
-        <p:nvSpPr>
-          <p:cNvPr id="10" name="Text 8"/>
-          <p:cNvSpPr/>
-          <p:nvPr/>
-        </p:nvSpPr>
-        <p:spPr>
-          <a:xfrm>
-            <a:off x="4892040" y="1828800"/>
-            <a:ext cx="3639312" cy="2395728"/>
-          </a:xfrm>
-          <a:prstGeom prst="rect">
-            <a:avLst/>
-          </a:prstGeom>
-          <a:noFill/>
-          <a:ln/>
-        </p:spPr>
-        <p:txBody>
-          <a:bodyPr wrap="square" lIns="381" tIns="381" rIns="381" bIns="381" rtlCol="0" anchor="ctr">
-            <a:normAutofit/>
-          </a:bodyPr>
-          <a:lstStyle/>
-          <a:p>
-            <a:pPr marL="342900" indent="-342900">
-              <a:buSzPct val="100000"/>
-              <a:buChar char="•"/>
-            </a:pPr>
-            <a:r>
-              <a:rPr lang="en-US" sz="1300" dirty="0">
-                <a:solidFill>
-                  <a:srgbClr val="212121"/>
-                </a:solidFill>
-                <a:latin typeface="Calibri" pitchFamily="34" charset="0"/>
-                <a:ea typeface="Calibri" pitchFamily="34" charset="-122"/>
-                <a:cs typeface="Calibri" pitchFamily="34" charset="-120"/>
-              </a:rPr>
-              <a:t>You need strict sequential processing → Sequential</a:t>
-            </a:r>
-            <a:endParaRPr lang="en-US" sz="1300" dirty="0"/>
-          </a:p>
-          <a:p>
-            <a:pPr marL="342900" indent="-342900">
-              <a:buSzPct val="100000"/>
-              <a:buChar char="•"/>
-            </a:pPr>
-            <a:r>
-              <a:rPr lang="en-US" sz="1300" dirty="0">
-                <a:solidFill>
-                  <a:srgbClr val="212121"/>
-                </a:solidFill>
-                <a:latin typeface="Calibri" pitchFamily="34" charset="0"/>
-                <a:ea typeface="Calibri" pitchFamily="34" charset="-122"/>
-                <a:cs typeface="Calibri" pitchFamily="34" charset="-120"/>
-              </a:rPr>
-              <a:t>Agents should work fully independently → Concurrent</a:t>
-            </a:r>
-            <a:endParaRPr lang="en-US" sz="1300" dirty="0"/>
-          </a:p>
-          <a:p>
-            <a:pPr marL="342900" indent="-342900">
-              <a:buSzPct val="100000"/>
-              <a:buChar char="•"/>
-            </a:pPr>
-            <a:r>
-              <a:rPr lang="en-US" sz="1300" dirty="0">
-                <a:solidFill>
-                  <a:srgbClr val="212121"/>
-                </a:solidFill>
-                <a:latin typeface="Calibri" pitchFamily="34" charset="0"/>
-                <a:ea typeface="Calibri" pitchFamily="34" charset="-122"/>
-                <a:cs typeface="Calibri" pitchFamily="34" charset="-120"/>
-              </a:rPr>
-              <a:t>You need direct agent-to-agent handoffs → Handoff</a:t>
-            </a:r>
-            <a:endParaRPr lang="en-US" sz="1300" dirty="0"/>
-          </a:p>
-          <a:p>
-            <a:pPr marL="342900" indent="-342900">
-              <a:buSzPct val="100000"/>
-              <a:buChar char="•"/>
-            </a:pPr>
-            <a:r>
-              <a:rPr lang="en-US" sz="1300" dirty="0">
-                <a:solidFill>
-                  <a:srgbClr val="212121"/>
-                </a:solidFill>
-                <a:latin typeface="Calibri" pitchFamily="34" charset="0"/>
-                <a:ea typeface="Calibri" pitchFamily="34" charset="-122"/>
-                <a:cs typeface="Calibri" pitchFamily="34" charset="-120"/>
-              </a:rPr>
-              <a:t>You need complex dynamic planning → Magentic</a:t>
-            </a:r>
-            <a:endParaRPr lang="en-US" sz="1300" dirty="0"/>
-          </a:p>
-        </p:txBody>
-      </p:sp>
-      <p:sp>
-        <p:nvSpPr>
-          <p:cNvPr id="11" name="Shape 9"/>
+              <a:t>Bounded by a maximum round/iteration count</a:t>
+            </a:r>
+            <a:endParaRPr lang="en-US" sz="1600" dirty="0"/>
+          </a:p>
+        </p:txBody>
+      </p:sp>
+      <p:pic>
+        <p:nvPicPr>
+          <p:cNvPr id="6" name="Image 0" descr="[object Object]">    </p:cNvPr>
+          <p:cNvPicPr>
+            <a:picLocks noChangeAspect="1"/>
+          </p:cNvPicPr>
+          <p:nvPr/>
+        </p:nvPicPr>
+        <p:blipFill>
+          <a:blip r:embed="rId1"/>
+          <a:stretch>
+            <a:fillRect/>
+          </a:stretch>
+        </p:blipFill>
+        <p:spPr>
+          <a:xfrm>
+            <a:off x="4663440" y="1788529"/>
+            <a:ext cx="4114800" cy="2211094"/>
+          </a:xfrm>
+          <a:prstGeom prst="rect">
+            <a:avLst/>
+          </a:prstGeom>
+        </p:spPr>
+      </p:pic>
+      <p:sp>
+        <p:nvSpPr>
+          <p:cNvPr id="7" name="Shape 4"/>
           <p:cNvSpPr/>
           <p:nvPr/>
         </p:nvSpPr>
@@ -3242,7 +3382,7 @@
       </p:sp>
       <p:sp>
         <p:nvSpPr>
-          <p:cNvPr id="12" name="Text 10"/>
+          <p:cNvPr id="8" name="Text 5"/>
           <p:cNvSpPr/>
           <p:nvPr/>
         </p:nvSpPr>
@@ -3409,7 +3549,7 @@
                 <a:ea typeface="Calibri" pitchFamily="34" charset="-122"/>
                 <a:cs typeface="Calibri" pitchFamily="34" charset="-120"/>
               </a:rPr>
-              <a:t>Magentic — a planning manager</a:t>
+              <a:t>When to use Group Chat</a:t>
             </a:r>
             <a:endParaRPr lang="en-US" sz="2800" dirty="0"/>
           </a:p>
@@ -3417,14 +3557,39 @@
       </p:sp>
       <p:sp>
         <p:nvSpPr>
-          <p:cNvPr id="5" name="Text 3"/>
-          <p:cNvSpPr/>
-          <p:nvPr/>
-        </p:nvSpPr>
-        <p:spPr>
-          <a:xfrm>
-            <a:off x="502920" y="1170432"/>
-            <a:ext cx="7955280" cy="3520440"/>
+          <p:cNvPr id="5" name="Shape 3"/>
+          <p:cNvSpPr/>
+          <p:nvPr/>
+        </p:nvSpPr>
+        <p:spPr>
+          <a:xfrm>
+            <a:off x="365760" y="1078992"/>
+            <a:ext cx="4114800" cy="3493008"/>
+          </a:xfrm>
+          <a:prstGeom prst="roundRect">
+            <a:avLst/>
+          </a:prstGeom>
+          <a:solidFill>
+            <a:srgbClr val="F3F4F6"/>
+          </a:solidFill>
+          <a:ln w="11430">
+            <a:solidFill>
+              <a:srgbClr val="D1D5DB"/>
+            </a:solidFill>
+            <a:prstDash val="solid"/>
+          </a:ln>
+        </p:spPr>
+      </p:sp>
+      <p:sp>
+        <p:nvSpPr>
+          <p:cNvPr id="6" name="Text 4"/>
+          <p:cNvSpPr/>
+          <p:nvPr/>
+        </p:nvSpPr>
+        <p:spPr>
+          <a:xfrm>
+            <a:off x="566928" y="1298448"/>
+            <a:ext cx="3712464" cy="411480"/>
           </a:xfrm>
           <a:prstGeom prst="rect">
             <a:avLst/>
@@ -3433,41 +3598,58 @@
           <a:ln/>
         </p:spPr>
         <p:txBody>
-          <a:bodyPr wrap="square" lIns="0" tIns="0" rIns="0" bIns="0" rtlCol="0" anchor="t">
+          <a:bodyPr wrap="square" lIns="0" tIns="0" rIns="0" bIns="0" rtlCol="0" anchor="ctr">
             <a:normAutofit/>
           </a:bodyPr>
           <a:lstStyle/>
           <a:p>
-            <a:pPr marL="342900" indent="-342900">
-              <a:spcAft>
-                <a:spcPts val="1000"/>
-              </a:spcAft>
-              <a:buSzPct val="100000"/>
-              <a:buChar char="•"/>
-            </a:pPr>
-            <a:r>
-              <a:rPr lang="en-US" sz="1600" dirty="0">
-                <a:solidFill>
-                  <a:srgbClr val="212121"/>
+            <a:pPr indent="0" marL="0">
+              <a:buNone/>
+            </a:pPr>
+            <a:r>
+              <a:rPr lang="en-US" sz="2000" b="1" dirty="0">
+                <a:solidFill>
+                  <a:srgbClr val="1E2761"/>
                 </a:solidFill>
                 <a:latin typeface="Calibri" pitchFamily="34" charset="0"/>
                 <a:ea typeface="Calibri" pitchFamily="34" charset="-122"/>
                 <a:cs typeface="Calibri" pitchFamily="34" charset="-120"/>
               </a:rPr>
-              <a:t>Same star-topology architecture as Group Chat, with a more powerful, planning-based manager</a:t>
-            </a:r>
-            <a:endParaRPr lang="en-US" sz="1600" dirty="0"/>
-          </a:p>
+              <a:t>Good fit</a:t>
+            </a:r>
+            <a:endParaRPr lang="en-US" sz="2000" dirty="0"/>
+          </a:p>
+        </p:txBody>
+      </p:sp>
+      <p:sp>
+        <p:nvSpPr>
+          <p:cNvPr id="7" name="Text 5"/>
+          <p:cNvSpPr/>
+          <p:nvPr/>
+        </p:nvSpPr>
+        <p:spPr>
+          <a:xfrm>
+            <a:off x="594360" y="1828800"/>
+            <a:ext cx="3639312" cy="2395728"/>
+          </a:xfrm>
+          <a:prstGeom prst="rect">
+            <a:avLst/>
+          </a:prstGeom>
+          <a:noFill/>
+          <a:ln/>
+        </p:spPr>
+        <p:txBody>
+          <a:bodyPr wrap="square" lIns="381" tIns="381" rIns="381" bIns="381" rtlCol="0" anchor="ctr">
+            <a:normAutofit/>
+          </a:bodyPr>
+          <a:lstStyle/>
           <a:p>
             <a:pPr marL="342900" indent="-342900">
-              <a:spcAft>
-                <a:spcPts val="1000"/>
-              </a:spcAft>
               <a:buSzPct val="100000"/>
               <a:buChar char="•"/>
             </a:pPr>
             <a:r>
-              <a:rPr lang="en-US" sz="1600" dirty="0">
+              <a:rPr lang="en-US" sz="1300" dirty="0">
                 <a:solidFill>
                   <a:srgbClr val="212121"/>
                 </a:solidFill>
@@ -3475,20 +3657,17 @@
                 <a:ea typeface="Calibri" pitchFamily="34" charset="-122"/>
                 <a:cs typeface="Calibri" pitchFamily="34" charset="-120"/>
               </a:rPr>
-              <a:t>Based on AutoGen's Magentic-One design; well suited to open-ended tasks where the solution path isn't known in advance</a:t>
-            </a:r>
-            <a:endParaRPr lang="en-US" sz="1600" dirty="0"/>
+              <a:t>Iterative refinement across multiple rounds</a:t>
+            </a:r>
+            <a:endParaRPr lang="en-US" sz="1300" dirty="0"/>
           </a:p>
           <a:p>
             <a:pPr marL="342900" indent="-342900">
-              <a:spcAft>
-                <a:spcPts val="1000"/>
-              </a:spcAft>
               <a:buSzPct val="100000"/>
               <a:buChar char="•"/>
             </a:pPr>
             <a:r>
-              <a:rPr lang="en-US" sz="1600" dirty="0">
+              <a:rPr lang="en-US" sz="1300" dirty="0">
                 <a:solidFill>
                   <a:srgbClr val="212121"/>
                 </a:solidFill>
@@ -3496,20 +3675,17 @@
                 <a:ea typeface="Calibri" pitchFamily="34" charset="-122"/>
                 <a:cs typeface="Calibri" pitchFamily="34" charset="-120"/>
               </a:rPr>
-              <a:t>Framework's own caveat: *"it is untested how well the Magentic orchestration will perform outside of the original Magentic-One design"*</a:t>
-            </a:r>
-            <a:endParaRPr lang="en-US" sz="1600" dirty="0"/>
+              <a:t>Collaborative problem-solving, multi-perspective analysis</a:t>
+            </a:r>
+            <a:endParaRPr lang="en-US" sz="1300" dirty="0"/>
           </a:p>
           <a:p>
             <a:pPr marL="342900" indent="-342900">
-              <a:spcAft>
-                <a:spcPts val="1000"/>
-              </a:spcAft>
               <a:buSzPct val="100000"/>
               <a:buChar char="•"/>
             </a:pPr>
             <a:r>
-              <a:rPr lang="en-US" sz="1600" dirty="0">
+              <a:rPr lang="en-US" sz="1300" dirty="0">
                 <a:solidFill>
                   <a:srgbClr val="212121"/>
                 </a:solidFill>
@@ -3517,15 +3693,177 @@
                 <a:ea typeface="Calibri" pitchFamily="34" charset="-122"/>
                 <a:cs typeface="Calibri" pitchFamily="34" charset="-120"/>
               </a:rPr>
-              <a:t>If your scenario doesn't need complex planning, the docs themselves recommend Group Chat instead</a:t>
-            </a:r>
-            <a:endParaRPr lang="en-US" sz="1600" dirty="0"/>
-          </a:p>
-        </p:txBody>
-      </p:sp>
-      <p:sp>
-        <p:nvSpPr>
-          <p:cNvPr id="6" name="Shape 4"/>
+              <a:t>Writer-reviewer content creation</a:t>
+            </a:r>
+            <a:endParaRPr lang="en-US" sz="1300" dirty="0"/>
+          </a:p>
+        </p:txBody>
+      </p:sp>
+      <p:sp>
+        <p:nvSpPr>
+          <p:cNvPr id="8" name="Shape 6"/>
+          <p:cNvSpPr/>
+          <p:nvPr/>
+        </p:nvSpPr>
+        <p:spPr>
+          <a:xfrm>
+            <a:off x="4663440" y="1078992"/>
+            <a:ext cx="4114800" cy="3493008"/>
+          </a:xfrm>
+          <a:prstGeom prst="roundRect">
+            <a:avLst/>
+          </a:prstGeom>
+          <a:solidFill>
+            <a:srgbClr val="CADCFC"/>
+          </a:solidFill>
+          <a:ln w="11430">
+            <a:solidFill>
+              <a:srgbClr val="1E2761"/>
+            </a:solidFill>
+            <a:prstDash val="solid"/>
+          </a:ln>
+        </p:spPr>
+      </p:sp>
+      <p:sp>
+        <p:nvSpPr>
+          <p:cNvPr id="9" name="Text 7"/>
+          <p:cNvSpPr/>
+          <p:nvPr/>
+        </p:nvSpPr>
+        <p:spPr>
+          <a:xfrm>
+            <a:off x="4864608" y="1298448"/>
+            <a:ext cx="3712464" cy="411480"/>
+          </a:xfrm>
+          <a:prstGeom prst="rect">
+            <a:avLst/>
+          </a:prstGeom>
+          <a:noFill/>
+          <a:ln/>
+        </p:spPr>
+        <p:txBody>
+          <a:bodyPr wrap="square" lIns="0" tIns="0" rIns="0" bIns="0" rtlCol="0" anchor="ctr">
+            <a:normAutofit/>
+          </a:bodyPr>
+          <a:lstStyle/>
+          <a:p>
+            <a:pPr indent="0" marL="0">
+              <a:buNone/>
+            </a:pPr>
+            <a:r>
+              <a:rPr lang="en-US" sz="2000" b="1" dirty="0">
+                <a:solidFill>
+                  <a:srgbClr val="1E2761"/>
+                </a:solidFill>
+                <a:latin typeface="Calibri" pitchFamily="34" charset="0"/>
+                <a:ea typeface="Calibri" pitchFamily="34" charset="-122"/>
+                <a:cs typeface="Calibri" pitchFamily="34" charset="-120"/>
+              </a:rPr>
+              <a:t>Consider an alternative when</a:t>
+            </a:r>
+            <a:endParaRPr lang="en-US" sz="2000" dirty="0"/>
+          </a:p>
+        </p:txBody>
+      </p:sp>
+      <p:sp>
+        <p:nvSpPr>
+          <p:cNvPr id="10" name="Text 8"/>
+          <p:cNvSpPr/>
+          <p:nvPr/>
+        </p:nvSpPr>
+        <p:spPr>
+          <a:xfrm>
+            <a:off x="4892040" y="1828800"/>
+            <a:ext cx="3639312" cy="2395728"/>
+          </a:xfrm>
+          <a:prstGeom prst="rect">
+            <a:avLst/>
+          </a:prstGeom>
+          <a:noFill/>
+          <a:ln/>
+        </p:spPr>
+        <p:txBody>
+          <a:bodyPr wrap="square" lIns="381" tIns="381" rIns="381" bIns="381" rtlCol="0" anchor="ctr">
+            <a:normAutofit/>
+          </a:bodyPr>
+          <a:lstStyle/>
+          <a:p>
+            <a:pPr marL="342900" indent="-342900">
+              <a:buSzPct val="100000"/>
+              <a:buChar char="•"/>
+            </a:pPr>
+            <a:r>
+              <a:rPr lang="en-US" sz="1300" dirty="0">
+                <a:solidFill>
+                  <a:srgbClr val="212121"/>
+                </a:solidFill>
+                <a:latin typeface="Calibri" pitchFamily="34" charset="0"/>
+                <a:ea typeface="Calibri" pitchFamily="34" charset="-122"/>
+                <a:cs typeface="Calibri" pitchFamily="34" charset="-120"/>
+              </a:rPr>
+              <a:t>You need strict sequential processing → Sequential</a:t>
+            </a:r>
+            <a:endParaRPr lang="en-US" sz="1300" dirty="0"/>
+          </a:p>
+          <a:p>
+            <a:pPr marL="342900" indent="-342900">
+              <a:buSzPct val="100000"/>
+              <a:buChar char="•"/>
+            </a:pPr>
+            <a:r>
+              <a:rPr lang="en-US" sz="1300" dirty="0">
+                <a:solidFill>
+                  <a:srgbClr val="212121"/>
+                </a:solidFill>
+                <a:latin typeface="Calibri" pitchFamily="34" charset="0"/>
+                <a:ea typeface="Calibri" pitchFamily="34" charset="-122"/>
+                <a:cs typeface="Calibri" pitchFamily="34" charset="-120"/>
+              </a:rPr>
+              <a:t>Agents should work fully independently → Concurrent</a:t>
+            </a:r>
+            <a:endParaRPr lang="en-US" sz="1300" dirty="0"/>
+          </a:p>
+          <a:p>
+            <a:pPr marL="342900" indent="-342900">
+              <a:buSzPct val="100000"/>
+              <a:buChar char="•"/>
+            </a:pPr>
+            <a:r>
+              <a:rPr lang="en-US" sz="1300" dirty="0">
+                <a:solidFill>
+                  <a:srgbClr val="212121"/>
+                </a:solidFill>
+                <a:latin typeface="Calibri" pitchFamily="34" charset="0"/>
+                <a:ea typeface="Calibri" pitchFamily="34" charset="-122"/>
+                <a:cs typeface="Calibri" pitchFamily="34" charset="-120"/>
+              </a:rPr>
+              <a:t>You need direct agent-to-agent handoffs → Handoff</a:t>
+            </a:r>
+            <a:endParaRPr lang="en-US" sz="1300" dirty="0"/>
+          </a:p>
+          <a:p>
+            <a:pPr marL="342900" indent="-342900">
+              <a:buSzPct val="100000"/>
+              <a:buChar char="•"/>
+            </a:pPr>
+            <a:r>
+              <a:rPr lang="en-US" sz="1300" dirty="0">
+                <a:solidFill>
+                  <a:srgbClr val="212121"/>
+                </a:solidFill>
+                <a:latin typeface="Calibri" pitchFamily="34" charset="0"/>
+                <a:ea typeface="Calibri" pitchFamily="34" charset="-122"/>
+                <a:cs typeface="Calibri" pitchFamily="34" charset="-120"/>
+              </a:rPr>
+              <a:t>You need complex dynamic planning → Magentic</a:t>
+            </a:r>
+            <a:endParaRPr lang="en-US" sz="1300" dirty="0"/>
+          </a:p>
+        </p:txBody>
+      </p:sp>
+      <p:sp>
+        <p:nvSpPr>
+          <p:cNvPr id="11" name="Shape 9"/>
           <p:cNvSpPr/>
           <p:nvPr/>
         </p:nvSpPr>
@@ -3548,7 +3886,7 @@
       </p:sp>
       <p:sp>
         <p:nvSpPr>
-          <p:cNvPr id="7" name="Text 5"/>
+          <p:cNvPr id="12" name="Text 10"/>
           <p:cNvSpPr/>
           <p:nvPr/>
         </p:nvSpPr>
@@ -3581,7 +3919,7 @@
                 <a:ea typeface="Calibri" pitchFamily="34" charset="-122"/>
                 <a:cs typeface="Calibri" pitchFamily="34" charset="-120"/>
               </a:rPr>
-              <a:t>Source: https://learn.microsoft.com/en-us/agent-framework/workflows/orchestrations/magentic</a:t>
+              <a:t>Source: https://learn.microsoft.com/en-us/agent-framework/workflows/orchestrations/group-chat</a:t>
             </a:r>
             <a:endParaRPr lang="en-US" sz="820" dirty="0"/>
           </a:p>
@@ -3707,7 +4045,7 @@
               <a:buNone/>
             </a:pPr>
             <a:r>
-              <a:rPr lang="en-US" sz="2500" b="1" dirty="0">
+              <a:rPr lang="en-US" sz="2800" b="1" dirty="0">
                 <a:solidFill>
                   <a:srgbClr val="1E2761"/>
                 </a:solidFill>
@@ -3715,39 +4053,123 @@
                 <a:ea typeface="Calibri" pitchFamily="34" charset="-122"/>
                 <a:cs typeface="Calibri" pitchFamily="34" charset="-120"/>
               </a:rPr>
-              <a:t>Magentic — task and progress ledgers</a:t>
-            </a:r>
-            <a:endParaRPr lang="en-US" sz="2500" dirty="0"/>
-          </a:p>
-        </p:txBody>
-      </p:sp>
-      <p:pic>
-        <p:nvPicPr>
-          <p:cNvPr id="5" name="Image 0" descr="[object Object]">    </p:cNvPr>
-          <p:cNvPicPr>
-            <a:picLocks noChangeAspect="1"/>
-          </p:cNvPicPr>
-          <p:nvPr/>
-        </p:nvPicPr>
-        <p:blipFill>
-          <a:blip r:embed="rId1"/>
-          <a:stretch>
-            <a:fillRect/>
-          </a:stretch>
-        </p:blipFill>
-        <p:spPr>
-          <a:xfrm>
-            <a:off x="1820804" y="1078992"/>
-            <a:ext cx="5502391" cy="3630168"/>
-          </a:xfrm>
-          <a:prstGeom prst="rect">
-            <a:avLst/>
-          </a:prstGeom>
-        </p:spPr>
-      </p:pic>
-      <p:sp>
-        <p:nvSpPr>
-          <p:cNvPr id="6" name="Shape 3"/>
+              <a:t>Magentic — a planning manager</a:t>
+            </a:r>
+            <a:endParaRPr lang="en-US" sz="2800" dirty="0"/>
+          </a:p>
+        </p:txBody>
+      </p:sp>
+      <p:sp>
+        <p:nvSpPr>
+          <p:cNvPr id="5" name="Text 3"/>
+          <p:cNvSpPr/>
+          <p:nvPr/>
+        </p:nvSpPr>
+        <p:spPr>
+          <a:xfrm>
+            <a:off x="502920" y="1170432"/>
+            <a:ext cx="7955280" cy="3520440"/>
+          </a:xfrm>
+          <a:prstGeom prst="rect">
+            <a:avLst/>
+          </a:prstGeom>
+          <a:noFill/>
+          <a:ln/>
+        </p:spPr>
+        <p:txBody>
+          <a:bodyPr wrap="square" lIns="0" tIns="0" rIns="0" bIns="0" rtlCol="0" anchor="t">
+            <a:normAutofit/>
+          </a:bodyPr>
+          <a:lstStyle/>
+          <a:p>
+            <a:pPr marL="342900" indent="-342900">
+              <a:spcAft>
+                <a:spcPts val="1000"/>
+              </a:spcAft>
+              <a:buSzPct val="100000"/>
+              <a:buChar char="•"/>
+            </a:pPr>
+            <a:r>
+              <a:rPr lang="en-US" sz="1600" dirty="0">
+                <a:solidFill>
+                  <a:srgbClr val="212121"/>
+                </a:solidFill>
+                <a:latin typeface="Calibri" pitchFamily="34" charset="0"/>
+                <a:ea typeface="Calibri" pitchFamily="34" charset="-122"/>
+                <a:cs typeface="Calibri" pitchFamily="34" charset="-120"/>
+              </a:rPr>
+              <a:t>Same star-topology architecture as Group Chat, with a more powerful, planning-based manager</a:t>
+            </a:r>
+            <a:endParaRPr lang="en-US" sz="1600" dirty="0"/>
+          </a:p>
+          <a:p>
+            <a:pPr marL="342900" indent="-342900">
+              <a:spcAft>
+                <a:spcPts val="1000"/>
+              </a:spcAft>
+              <a:buSzPct val="100000"/>
+              <a:buChar char="•"/>
+            </a:pPr>
+            <a:r>
+              <a:rPr lang="en-US" sz="1600" dirty="0">
+                <a:solidFill>
+                  <a:srgbClr val="212121"/>
+                </a:solidFill>
+                <a:latin typeface="Calibri" pitchFamily="34" charset="0"/>
+                <a:ea typeface="Calibri" pitchFamily="34" charset="-122"/>
+                <a:cs typeface="Calibri" pitchFamily="34" charset="-120"/>
+              </a:rPr>
+              <a:t>Based on AutoGen's Magentic-One design; well suited to open-ended tasks where the solution path isn't known in advance</a:t>
+            </a:r>
+            <a:endParaRPr lang="en-US" sz="1600" dirty="0"/>
+          </a:p>
+          <a:p>
+            <a:pPr marL="342900" indent="-342900">
+              <a:spcAft>
+                <a:spcPts val="1000"/>
+              </a:spcAft>
+              <a:buSzPct val="100000"/>
+              <a:buChar char="•"/>
+            </a:pPr>
+            <a:r>
+              <a:rPr lang="en-US" sz="1600" dirty="0">
+                <a:solidFill>
+                  <a:srgbClr val="212121"/>
+                </a:solidFill>
+                <a:latin typeface="Calibri" pitchFamily="34" charset="0"/>
+                <a:ea typeface="Calibri" pitchFamily="34" charset="-122"/>
+                <a:cs typeface="Calibri" pitchFamily="34" charset="-120"/>
+              </a:rPr>
+              <a:t>Framework's own caveat: *"it is untested how well the Magentic orchestration will perform outside of the original Magentic-One design"*</a:t>
+            </a:r>
+            <a:endParaRPr lang="en-US" sz="1600" dirty="0"/>
+          </a:p>
+          <a:p>
+            <a:pPr marL="342900" indent="-342900">
+              <a:spcAft>
+                <a:spcPts val="1000"/>
+              </a:spcAft>
+              <a:buSzPct val="100000"/>
+              <a:buChar char="•"/>
+            </a:pPr>
+            <a:r>
+              <a:rPr lang="en-US" sz="1600" dirty="0">
+                <a:solidFill>
+                  <a:srgbClr val="212121"/>
+                </a:solidFill>
+                <a:latin typeface="Calibri" pitchFamily="34" charset="0"/>
+                <a:ea typeface="Calibri" pitchFamily="34" charset="-122"/>
+                <a:cs typeface="Calibri" pitchFamily="34" charset="-120"/>
+              </a:rPr>
+              <a:t>If your scenario doesn't need complex planning, the docs themselves recommend Group Chat instead</a:t>
+            </a:r>
+            <a:endParaRPr lang="en-US" sz="1600" dirty="0"/>
+          </a:p>
+        </p:txBody>
+      </p:sp>
+      <p:sp>
+        <p:nvSpPr>
+          <p:cNvPr id="6" name="Shape 4"/>
           <p:cNvSpPr/>
           <p:nvPr/>
         </p:nvSpPr>
@@ -3770,7 +4192,7 @@
       </p:sp>
       <p:sp>
         <p:nvSpPr>
-          <p:cNvPr id="7" name="Text 4"/>
+          <p:cNvPr id="7" name="Text 5"/>
           <p:cNvSpPr/>
           <p:nvPr/>
         </p:nvSpPr>
@@ -3929,7 +4351,7 @@
               <a:buNone/>
             </a:pPr>
             <a:r>
-              <a:rPr lang="en-US" sz="2800" b="1" dirty="0">
+              <a:rPr lang="en-US" sz="2500" b="1" dirty="0">
                 <a:solidFill>
                   <a:srgbClr val="1E2761"/>
                 </a:solidFill>
@@ -3937,292 +4359,39 @@
                 <a:ea typeface="Calibri" pitchFamily="34" charset="-122"/>
                 <a:cs typeface="Calibri" pitchFamily="34" charset="-120"/>
               </a:rPr>
-              <a:t>Magentic's built-in guardrails</a:t>
-            </a:r>
-            <a:endParaRPr lang="en-US" sz="2800" dirty="0"/>
-          </a:p>
-        </p:txBody>
-      </p:sp>
-      <p:sp>
-        <p:nvSpPr>
-          <p:cNvPr id="5" name="Shape 3"/>
-          <p:cNvSpPr/>
-          <p:nvPr/>
-        </p:nvSpPr>
-        <p:spPr>
-          <a:xfrm>
-            <a:off x="365760" y="1115568"/>
-            <a:ext cx="8412480" cy="2350008"/>
-          </a:xfrm>
-          <a:prstGeom prst="rect">
-            <a:avLst/>
-          </a:prstGeom>
-          <a:solidFill>
-            <a:srgbClr val="1D1E22"/>
-          </a:solidFill>
-          <a:ln w="9525">
-            <a:solidFill>
-              <a:srgbClr val="2A2B2E"/>
-            </a:solidFill>
-            <a:prstDash val="solid"/>
-          </a:ln>
-        </p:spPr>
-      </p:sp>
-      <p:sp>
-        <p:nvSpPr>
-          <p:cNvPr id="6" name="Text 4"/>
-          <p:cNvSpPr/>
-          <p:nvPr/>
-        </p:nvSpPr>
-        <p:spPr>
-          <a:xfrm>
-            <a:off x="502920" y="1207008"/>
-            <a:ext cx="8138160" cy="2167128"/>
-          </a:xfrm>
-          <a:prstGeom prst="rect">
-            <a:avLst/>
-          </a:prstGeom>
-          <a:noFill/>
-          <a:ln/>
-        </p:spPr>
-        <p:txBody>
-          <a:bodyPr wrap="square" lIns="0" tIns="0" rIns="0" bIns="0" rtlCol="0" anchor="t">
-            <a:normAutofit/>
-          </a:bodyPr>
-          <a:lstStyle/>
-          <a:p>
-            <a:pPr indent="0" marL="0">
-              <a:buNone/>
-            </a:pPr>
-            <a:r>
-              <a:rPr lang="en-US" sz="1280" dirty="0">
-                <a:solidFill>
-                  <a:srgbClr val="A996B6"/>
-                </a:solidFill>
-                <a:latin typeface="Consolas" pitchFamily="34" charset="0"/>
-                <a:ea typeface="Consolas" pitchFamily="34" charset="-122"/>
-                <a:cs typeface="Consolas" pitchFamily="34" charset="-120"/>
-              </a:rPr>
-              <a:t>from</a:t>
-            </a:r>
-            <a:pPr indent="0" marL="0">
-              <a:buNone/>
-            </a:pPr>
-            <a:r>
-              <a:rPr lang="en-US" sz="1280" dirty="0">
-                <a:solidFill>
-                  <a:srgbClr val="FFFFFF"/>
-                </a:solidFill>
-                <a:latin typeface="Consolas" pitchFamily="34" charset="0"/>
-                <a:ea typeface="Consolas" pitchFamily="34" charset="-122"/>
-                <a:cs typeface="Consolas" pitchFamily="34" charset="-120"/>
-              </a:rPr>
-              <a:t> agent_framework.orchestrations </a:t>
-            </a:r>
-            <a:pPr indent="0" marL="0">
-              <a:buNone/>
-            </a:pPr>
-            <a:r>
-              <a:rPr lang="en-US" sz="1280" dirty="0">
-                <a:solidFill>
-                  <a:srgbClr val="A996B6"/>
-                </a:solidFill>
-                <a:latin typeface="Consolas" pitchFamily="34" charset="0"/>
-                <a:ea typeface="Consolas" pitchFamily="34" charset="-122"/>
-                <a:cs typeface="Consolas" pitchFamily="34" charset="-120"/>
-              </a:rPr>
-              <a:t>import</a:t>
-            </a:r>
-            <a:pPr indent="0" marL="0">
-              <a:buNone/>
-            </a:pPr>
-            <a:r>
-              <a:rPr lang="en-US" sz="1280" dirty="0">
-                <a:solidFill>
-                  <a:srgbClr val="FFFFFF"/>
-                </a:solidFill>
-                <a:latin typeface="Consolas" pitchFamily="34" charset="0"/>
-                <a:ea typeface="Consolas" pitchFamily="34" charset="-122"/>
-                <a:cs typeface="Consolas" pitchFamily="34" charset="-120"/>
-              </a:rPr>
-              <a:t> MagenticBuilder</a:t>
-            </a:r>
-            <a:endParaRPr lang="en-US" sz="1280" dirty="0"/>
-          </a:p>
-          <a:p>
-            <a:pPr indent="0" marL="0">
-              <a:buNone/>
-            </a:pPr>
-            <a:endParaRPr lang="en-US" sz="1280" dirty="0"/>
-          </a:p>
-          <a:p>
-            <a:pPr indent="0" marL="0">
-              <a:buNone/>
-            </a:pPr>
-            <a:r>
-              <a:rPr lang="en-US" sz="1280" dirty="0">
-                <a:solidFill>
-                  <a:srgbClr val="FFFFFF"/>
-                </a:solidFill>
-                <a:latin typeface="Consolas" pitchFamily="34" charset="0"/>
-                <a:ea typeface="Consolas" pitchFamily="34" charset="-122"/>
-                <a:cs typeface="Consolas" pitchFamily="34" charset="-120"/>
-              </a:rPr>
-              <a:t>workflow = MagenticBuilder(</a:t>
-            </a:r>
-            <a:endParaRPr lang="en-US" sz="1280" dirty="0"/>
-          </a:p>
-          <a:p>
-            <a:pPr indent="0" marL="0">
-              <a:buNone/>
-            </a:pPr>
-            <a:r>
-              <a:rPr lang="en-US" sz="1280" dirty="0">
-                <a:solidFill>
-                  <a:srgbClr val="FFFFFF"/>
-                </a:solidFill>
-                <a:latin typeface="Consolas" pitchFamily="34" charset="0"/>
-                <a:ea typeface="Consolas" pitchFamily="34" charset="-122"/>
-                <a:cs typeface="Consolas" pitchFamily="34" charset="-120"/>
-              </a:rPr>
-              <a:t>    participants=[researcher_agent, coder_agent],</a:t>
-            </a:r>
-            <a:endParaRPr lang="en-US" sz="1280" dirty="0"/>
-          </a:p>
-          <a:p>
-            <a:pPr indent="0" marL="0">
-              <a:buNone/>
-            </a:pPr>
-            <a:r>
-              <a:rPr lang="en-US" sz="1280" dirty="0">
-                <a:solidFill>
-                  <a:srgbClr val="FFFFFF"/>
-                </a:solidFill>
-                <a:latin typeface="Consolas" pitchFamily="34" charset="0"/>
-                <a:ea typeface="Consolas" pitchFamily="34" charset="-122"/>
-                <a:cs typeface="Consolas" pitchFamily="34" charset="-120"/>
-              </a:rPr>
-              <a:t>    manager_agent=manager_agent,</a:t>
-            </a:r>
-            <a:endParaRPr lang="en-US" sz="1280" dirty="0"/>
-          </a:p>
-          <a:p>
-            <a:pPr indent="0" marL="0">
-              <a:buNone/>
-            </a:pPr>
-            <a:r>
-              <a:rPr lang="en-US" sz="1280" dirty="0">
-                <a:solidFill>
-                  <a:srgbClr val="FFFFFF"/>
-                </a:solidFill>
-                <a:latin typeface="Consolas" pitchFamily="34" charset="0"/>
-                <a:ea typeface="Consolas" pitchFamily="34" charset="-122"/>
-                <a:cs typeface="Consolas" pitchFamily="34" charset="-120"/>
-              </a:rPr>
-              <a:t>    max_round_count=10,</a:t>
-            </a:r>
-            <a:endParaRPr lang="en-US" sz="1280" dirty="0"/>
-          </a:p>
-          <a:p>
-            <a:pPr indent="0" marL="0">
-              <a:buNone/>
-            </a:pPr>
-            <a:r>
-              <a:rPr lang="en-US" sz="1280" dirty="0">
-                <a:solidFill>
-                  <a:srgbClr val="FFFFFF"/>
-                </a:solidFill>
-                <a:latin typeface="Consolas" pitchFamily="34" charset="0"/>
-                <a:ea typeface="Consolas" pitchFamily="34" charset="-122"/>
-                <a:cs typeface="Consolas" pitchFamily="34" charset="-120"/>
-              </a:rPr>
-              <a:t>    max_stall_count=3,</a:t>
-            </a:r>
-            <a:endParaRPr lang="en-US" sz="1280" dirty="0"/>
-          </a:p>
-          <a:p>
-            <a:pPr indent="0" marL="0">
-              <a:buNone/>
-            </a:pPr>
-            <a:r>
-              <a:rPr lang="en-US" sz="1280" dirty="0">
-                <a:solidFill>
-                  <a:srgbClr val="FFFFFF"/>
-                </a:solidFill>
-                <a:latin typeface="Consolas" pitchFamily="34" charset="0"/>
-                <a:ea typeface="Consolas" pitchFamily="34" charset="-122"/>
-                <a:cs typeface="Consolas" pitchFamily="34" charset="-120"/>
-              </a:rPr>
-              <a:t>    max_reset_count=2,</a:t>
-            </a:r>
-            <a:endParaRPr lang="en-US" sz="1280" dirty="0"/>
-          </a:p>
-          <a:p>
-            <a:pPr indent="0" marL="0">
-              <a:buNone/>
-            </a:pPr>
-            <a:r>
-              <a:rPr lang="en-US" sz="1280" dirty="0">
-                <a:solidFill>
-                  <a:srgbClr val="FFFFFF"/>
-                </a:solidFill>
-                <a:latin typeface="Consolas" pitchFamily="34" charset="0"/>
-                <a:ea typeface="Consolas" pitchFamily="34" charset="-122"/>
-                <a:cs typeface="Consolas" pitchFamily="34" charset="-120"/>
-              </a:rPr>
-              <a:t>).build()</a:t>
-            </a:r>
-            <a:endParaRPr lang="en-US" sz="1280" dirty="0"/>
-          </a:p>
-        </p:txBody>
-      </p:sp>
-      <p:sp>
-        <p:nvSpPr>
-          <p:cNvPr id="7" name="Text 5"/>
-          <p:cNvSpPr/>
-          <p:nvPr/>
-        </p:nvSpPr>
-        <p:spPr>
-          <a:xfrm>
-            <a:off x="365760" y="3719068"/>
-            <a:ext cx="8412480" cy="990092"/>
-          </a:xfrm>
-          <a:prstGeom prst="rect">
-            <a:avLst/>
-          </a:prstGeom>
-          <a:noFill/>
-          <a:ln/>
-        </p:spPr>
-        <p:txBody>
-          <a:bodyPr wrap="square" lIns="0" tIns="0" rIns="0" bIns="0" rtlCol="0" anchor="t">
-            <a:normAutofit/>
-          </a:bodyPr>
-          <a:lstStyle/>
-          <a:p>
-            <a:pPr indent="0" marL="0">
-              <a:spcAft>
-                <a:spcPts val="800"/>
-              </a:spcAft>
-              <a:buNone/>
-            </a:pPr>
-            <a:r>
-              <a:rPr lang="en-US" sz="1300" dirty="0">
-                <a:solidFill>
-                  <a:srgbClr val="6B7280"/>
-                </a:solidFill>
-                <a:latin typeface="Calibri" pitchFamily="34" charset="0"/>
-                <a:ea typeface="Calibri" pitchFamily="34" charset="-122"/>
-                <a:cs typeface="Calibri" pitchFamily="34" charset="-120"/>
-              </a:rPr>
-              <a:t>A progress ledger tracks whether the team is making progress; consecutive non-progressing rounds increment a stall counter, and exceeding max_stall_count triggers an automatic reset and replan (up to max_reset_count times) — a concrete, built-in instance of the guardrail pattern Module 6 covers generically.</a:t>
-            </a:r>
-            <a:endParaRPr lang="en-US" sz="1300" dirty="0"/>
-          </a:p>
-        </p:txBody>
-      </p:sp>
-      <p:sp>
-        <p:nvSpPr>
-          <p:cNvPr id="8" name="Shape 6"/>
+              <a:t>Magentic — task and progress ledgers</a:t>
+            </a:r>
+            <a:endParaRPr lang="en-US" sz="2500" dirty="0"/>
+          </a:p>
+        </p:txBody>
+      </p:sp>
+      <p:pic>
+        <p:nvPicPr>
+          <p:cNvPr id="5" name="Image 0" descr="[object Object]">    </p:cNvPr>
+          <p:cNvPicPr>
+            <a:picLocks noChangeAspect="1"/>
+          </p:cNvPicPr>
+          <p:nvPr/>
+        </p:nvPicPr>
+        <p:blipFill>
+          <a:blip r:embed="rId1"/>
+          <a:stretch>
+            <a:fillRect/>
+          </a:stretch>
+        </p:blipFill>
+        <p:spPr>
+          <a:xfrm>
+            <a:off x="1820804" y="1078992"/>
+            <a:ext cx="5502391" cy="3630168"/>
+          </a:xfrm>
+          <a:prstGeom prst="rect">
+            <a:avLst/>
+          </a:prstGeom>
+        </p:spPr>
+      </p:pic>
+      <p:sp>
+        <p:nvSpPr>
+          <p:cNvPr id="6" name="Shape 3"/>
           <p:cNvSpPr/>
           <p:nvPr/>
         </p:nvSpPr>
@@ -4245,7 +4414,7 @@
       </p:sp>
       <p:sp>
         <p:nvSpPr>
-          <p:cNvPr id="9" name="Text 7"/>
+          <p:cNvPr id="7" name="Text 4"/>
           <p:cNvSpPr/>
           <p:nvPr/>
         </p:nvSpPr>
@@ -4404,7 +4573,7 @@
               <a:buNone/>
             </a:pPr>
             <a:r>
-              <a:rPr lang="en-US" sz="2500" b="1" dirty="0">
+              <a:rPr lang="en-US" sz="2800" b="1" dirty="0">
                 <a:solidFill>
                   <a:srgbClr val="1E2761"/>
                 </a:solidFill>
@@ -4412,6 +4581,481 @@
                 <a:ea typeface="Calibri" pitchFamily="34" charset="-122"/>
                 <a:cs typeface="Calibri" pitchFamily="34" charset="-120"/>
               </a:rPr>
+              <a:t>Magentic's built-in guardrails</a:t>
+            </a:r>
+            <a:endParaRPr lang="en-US" sz="2800" dirty="0"/>
+          </a:p>
+        </p:txBody>
+      </p:sp>
+      <p:sp>
+        <p:nvSpPr>
+          <p:cNvPr id="5" name="Shape 3"/>
+          <p:cNvSpPr/>
+          <p:nvPr/>
+        </p:nvSpPr>
+        <p:spPr>
+          <a:xfrm>
+            <a:off x="365760" y="1115568"/>
+            <a:ext cx="8412480" cy="2350008"/>
+          </a:xfrm>
+          <a:prstGeom prst="rect">
+            <a:avLst/>
+          </a:prstGeom>
+          <a:solidFill>
+            <a:srgbClr val="1D1E22"/>
+          </a:solidFill>
+          <a:ln w="9525">
+            <a:solidFill>
+              <a:srgbClr val="2A2B2E"/>
+            </a:solidFill>
+            <a:prstDash val="solid"/>
+          </a:ln>
+        </p:spPr>
+      </p:sp>
+      <p:sp>
+        <p:nvSpPr>
+          <p:cNvPr id="6" name="Text 4"/>
+          <p:cNvSpPr/>
+          <p:nvPr/>
+        </p:nvSpPr>
+        <p:spPr>
+          <a:xfrm>
+            <a:off x="502920" y="1207008"/>
+            <a:ext cx="8138160" cy="2167128"/>
+          </a:xfrm>
+          <a:prstGeom prst="rect">
+            <a:avLst/>
+          </a:prstGeom>
+          <a:noFill/>
+          <a:ln/>
+        </p:spPr>
+        <p:txBody>
+          <a:bodyPr wrap="square" lIns="0" tIns="0" rIns="0" bIns="0" rtlCol="0" anchor="t">
+            <a:normAutofit/>
+          </a:bodyPr>
+          <a:lstStyle/>
+          <a:p>
+            <a:pPr indent="0" marL="0">
+              <a:buNone/>
+            </a:pPr>
+            <a:r>
+              <a:rPr lang="en-US" sz="1280" dirty="0">
+                <a:solidFill>
+                  <a:srgbClr val="A996B6"/>
+                </a:solidFill>
+                <a:latin typeface="Consolas" pitchFamily="34" charset="0"/>
+                <a:ea typeface="Consolas" pitchFamily="34" charset="-122"/>
+                <a:cs typeface="Consolas" pitchFamily="34" charset="-120"/>
+              </a:rPr>
+              <a:t>from</a:t>
+            </a:r>
+            <a:pPr indent="0" marL="0">
+              <a:buNone/>
+            </a:pPr>
+            <a:r>
+              <a:rPr lang="en-US" sz="1280" dirty="0">
+                <a:solidFill>
+                  <a:srgbClr val="FFFFFF"/>
+                </a:solidFill>
+                <a:latin typeface="Consolas" pitchFamily="34" charset="0"/>
+                <a:ea typeface="Consolas" pitchFamily="34" charset="-122"/>
+                <a:cs typeface="Consolas" pitchFamily="34" charset="-120"/>
+              </a:rPr>
+              <a:t> agent_framework.orchestrations </a:t>
+            </a:r>
+            <a:pPr indent="0" marL="0">
+              <a:buNone/>
+            </a:pPr>
+            <a:r>
+              <a:rPr lang="en-US" sz="1280" dirty="0">
+                <a:solidFill>
+                  <a:srgbClr val="A996B6"/>
+                </a:solidFill>
+                <a:latin typeface="Consolas" pitchFamily="34" charset="0"/>
+                <a:ea typeface="Consolas" pitchFamily="34" charset="-122"/>
+                <a:cs typeface="Consolas" pitchFamily="34" charset="-120"/>
+              </a:rPr>
+              <a:t>import</a:t>
+            </a:r>
+            <a:pPr indent="0" marL="0">
+              <a:buNone/>
+            </a:pPr>
+            <a:r>
+              <a:rPr lang="en-US" sz="1280" dirty="0">
+                <a:solidFill>
+                  <a:srgbClr val="FFFFFF"/>
+                </a:solidFill>
+                <a:latin typeface="Consolas" pitchFamily="34" charset="0"/>
+                <a:ea typeface="Consolas" pitchFamily="34" charset="-122"/>
+                <a:cs typeface="Consolas" pitchFamily="34" charset="-120"/>
+              </a:rPr>
+              <a:t> MagenticBuilder</a:t>
+            </a:r>
+            <a:endParaRPr lang="en-US" sz="1280" dirty="0"/>
+          </a:p>
+          <a:p>
+            <a:pPr indent="0" marL="0">
+              <a:buNone/>
+            </a:pPr>
+            <a:endParaRPr lang="en-US" sz="1280" dirty="0"/>
+          </a:p>
+          <a:p>
+            <a:pPr indent="0" marL="0">
+              <a:buNone/>
+            </a:pPr>
+            <a:r>
+              <a:rPr lang="en-US" sz="1280" dirty="0">
+                <a:solidFill>
+                  <a:srgbClr val="FFFFFF"/>
+                </a:solidFill>
+                <a:latin typeface="Consolas" pitchFamily="34" charset="0"/>
+                <a:ea typeface="Consolas" pitchFamily="34" charset="-122"/>
+                <a:cs typeface="Consolas" pitchFamily="34" charset="-120"/>
+              </a:rPr>
+              <a:t>workflow = MagenticBuilder(</a:t>
+            </a:r>
+            <a:endParaRPr lang="en-US" sz="1280" dirty="0"/>
+          </a:p>
+          <a:p>
+            <a:pPr indent="0" marL="0">
+              <a:buNone/>
+            </a:pPr>
+            <a:r>
+              <a:rPr lang="en-US" sz="1280" dirty="0">
+                <a:solidFill>
+                  <a:srgbClr val="FFFFFF"/>
+                </a:solidFill>
+                <a:latin typeface="Consolas" pitchFamily="34" charset="0"/>
+                <a:ea typeface="Consolas" pitchFamily="34" charset="-122"/>
+                <a:cs typeface="Consolas" pitchFamily="34" charset="-120"/>
+              </a:rPr>
+              <a:t>    participants=[researcher_agent, coder_agent],</a:t>
+            </a:r>
+            <a:endParaRPr lang="en-US" sz="1280" dirty="0"/>
+          </a:p>
+          <a:p>
+            <a:pPr indent="0" marL="0">
+              <a:buNone/>
+            </a:pPr>
+            <a:r>
+              <a:rPr lang="en-US" sz="1280" dirty="0">
+                <a:solidFill>
+                  <a:srgbClr val="FFFFFF"/>
+                </a:solidFill>
+                <a:latin typeface="Consolas" pitchFamily="34" charset="0"/>
+                <a:ea typeface="Consolas" pitchFamily="34" charset="-122"/>
+                <a:cs typeface="Consolas" pitchFamily="34" charset="-120"/>
+              </a:rPr>
+              <a:t>    manager_agent=manager_agent,</a:t>
+            </a:r>
+            <a:endParaRPr lang="en-US" sz="1280" dirty="0"/>
+          </a:p>
+          <a:p>
+            <a:pPr indent="0" marL="0">
+              <a:buNone/>
+            </a:pPr>
+            <a:r>
+              <a:rPr lang="en-US" sz="1280" dirty="0">
+                <a:solidFill>
+                  <a:srgbClr val="FFFFFF"/>
+                </a:solidFill>
+                <a:latin typeface="Consolas" pitchFamily="34" charset="0"/>
+                <a:ea typeface="Consolas" pitchFamily="34" charset="-122"/>
+                <a:cs typeface="Consolas" pitchFamily="34" charset="-120"/>
+              </a:rPr>
+              <a:t>    max_round_count=10,</a:t>
+            </a:r>
+            <a:endParaRPr lang="en-US" sz="1280" dirty="0"/>
+          </a:p>
+          <a:p>
+            <a:pPr indent="0" marL="0">
+              <a:buNone/>
+            </a:pPr>
+            <a:r>
+              <a:rPr lang="en-US" sz="1280" dirty="0">
+                <a:solidFill>
+                  <a:srgbClr val="FFFFFF"/>
+                </a:solidFill>
+                <a:latin typeface="Consolas" pitchFamily="34" charset="0"/>
+                <a:ea typeface="Consolas" pitchFamily="34" charset="-122"/>
+                <a:cs typeface="Consolas" pitchFamily="34" charset="-120"/>
+              </a:rPr>
+              <a:t>    max_stall_count=3,</a:t>
+            </a:r>
+            <a:endParaRPr lang="en-US" sz="1280" dirty="0"/>
+          </a:p>
+          <a:p>
+            <a:pPr indent="0" marL="0">
+              <a:buNone/>
+            </a:pPr>
+            <a:r>
+              <a:rPr lang="en-US" sz="1280" dirty="0">
+                <a:solidFill>
+                  <a:srgbClr val="FFFFFF"/>
+                </a:solidFill>
+                <a:latin typeface="Consolas" pitchFamily="34" charset="0"/>
+                <a:ea typeface="Consolas" pitchFamily="34" charset="-122"/>
+                <a:cs typeface="Consolas" pitchFamily="34" charset="-120"/>
+              </a:rPr>
+              <a:t>    max_reset_count=2,</a:t>
+            </a:r>
+            <a:endParaRPr lang="en-US" sz="1280" dirty="0"/>
+          </a:p>
+          <a:p>
+            <a:pPr indent="0" marL="0">
+              <a:buNone/>
+            </a:pPr>
+            <a:r>
+              <a:rPr lang="en-US" sz="1280" dirty="0">
+                <a:solidFill>
+                  <a:srgbClr val="FFFFFF"/>
+                </a:solidFill>
+                <a:latin typeface="Consolas" pitchFamily="34" charset="0"/>
+                <a:ea typeface="Consolas" pitchFamily="34" charset="-122"/>
+                <a:cs typeface="Consolas" pitchFamily="34" charset="-120"/>
+              </a:rPr>
+              <a:t>).build()</a:t>
+            </a:r>
+            <a:endParaRPr lang="en-US" sz="1280" dirty="0"/>
+          </a:p>
+        </p:txBody>
+      </p:sp>
+      <p:sp>
+        <p:nvSpPr>
+          <p:cNvPr id="7" name="Text 5"/>
+          <p:cNvSpPr/>
+          <p:nvPr/>
+        </p:nvSpPr>
+        <p:spPr>
+          <a:xfrm>
+            <a:off x="365760" y="3719068"/>
+            <a:ext cx="8412480" cy="990092"/>
+          </a:xfrm>
+          <a:prstGeom prst="rect">
+            <a:avLst/>
+          </a:prstGeom>
+          <a:noFill/>
+          <a:ln/>
+        </p:spPr>
+        <p:txBody>
+          <a:bodyPr wrap="square" lIns="0" tIns="0" rIns="0" bIns="0" rtlCol="0" anchor="t">
+            <a:normAutofit/>
+          </a:bodyPr>
+          <a:lstStyle/>
+          <a:p>
+            <a:pPr indent="0" marL="0">
+              <a:spcAft>
+                <a:spcPts val="800"/>
+              </a:spcAft>
+              <a:buNone/>
+            </a:pPr>
+            <a:r>
+              <a:rPr lang="en-US" sz="1300" dirty="0">
+                <a:solidFill>
+                  <a:srgbClr val="6B7280"/>
+                </a:solidFill>
+                <a:latin typeface="Calibri" pitchFamily="34" charset="0"/>
+                <a:ea typeface="Calibri" pitchFamily="34" charset="-122"/>
+                <a:cs typeface="Calibri" pitchFamily="34" charset="-120"/>
+              </a:rPr>
+              <a:t>A progress ledger tracks whether the team is making progress; consecutive non-progressing rounds increment a stall counter, and exceeding max_stall_count triggers an automatic reset and replan (up to max_reset_count times) — a concrete, built-in instance of the guardrail pattern Module 6 covers generically.</a:t>
+            </a:r>
+            <a:endParaRPr lang="en-US" sz="1300" dirty="0"/>
+          </a:p>
+        </p:txBody>
+      </p:sp>
+      <p:sp>
+        <p:nvSpPr>
+          <p:cNvPr id="8" name="Shape 6"/>
+          <p:cNvSpPr/>
+          <p:nvPr/>
+        </p:nvSpPr>
+        <p:spPr>
+          <a:xfrm>
+            <a:off x="365760" y="4773168"/>
+            <a:ext cx="8412480" cy="0"/>
+          </a:xfrm>
+          <a:prstGeom prst="line">
+            <a:avLst/>
+          </a:prstGeom>
+          <a:noFill/>
+          <a:ln w="6350">
+            <a:solidFill>
+              <a:srgbClr val="D1D5DB"/>
+            </a:solidFill>
+            <a:prstDash val="solid"/>
+          </a:ln>
+        </p:spPr>
+      </p:sp>
+      <p:sp>
+        <p:nvSpPr>
+          <p:cNvPr id="9" name="Text 7"/>
+          <p:cNvSpPr/>
+          <p:nvPr/>
+        </p:nvSpPr>
+        <p:spPr>
+          <a:xfrm>
+            <a:off x="384048" y="4818888"/>
+            <a:ext cx="8275320" cy="182880"/>
+          </a:xfrm>
+          <a:prstGeom prst="rect">
+            <a:avLst/>
+          </a:prstGeom>
+          <a:noFill/>
+          <a:ln/>
+        </p:spPr>
+        <p:txBody>
+          <a:bodyPr wrap="square" lIns="0" tIns="0" rIns="0" bIns="0" rtlCol="0" anchor="ctr">
+            <a:normAutofit/>
+          </a:bodyPr>
+          <a:lstStyle/>
+          <a:p>
+            <a:pPr indent="0" marL="0">
+              <a:buNone/>
+            </a:pPr>
+            <a:r>
+              <a:rPr lang="en-US" sz="820" dirty="0">
+                <a:solidFill>
+                  <a:srgbClr val="6B7280"/>
+                </a:solidFill>
+                <a:latin typeface="Calibri" pitchFamily="34" charset="0"/>
+                <a:ea typeface="Calibri" pitchFamily="34" charset="-122"/>
+                <a:cs typeface="Calibri" pitchFamily="34" charset="-120"/>
+              </a:rPr>
+              <a:t>Source: https://learn.microsoft.com/en-us/agent-framework/workflows/orchestrations/magentic</a:t>
+            </a:r>
+            <a:endParaRPr lang="en-US" sz="820" dirty="0"/>
+          </a:p>
+        </p:txBody>
+      </p:sp>
+    </p:spTree>
+  </p:cSld>
+  <p:clrMapOvr>
+    <a:masterClrMapping/>
+  </p:clrMapOvr>
+</p:sld>
+</file>
+
+<file path=ppt/slides/slide16.xml><?xml version="1.0" encoding="utf-8"?>
+<p:sld xmlns:a="http://schemas.openxmlformats.org/drawingml/2006/main" xmlns:r="http://schemas.openxmlformats.org/officeDocument/2006/relationships" xmlns:p="http://schemas.openxmlformats.org/presentationml/2006/main">
+  <p:cSld name="Slide 16">
+    <p:bg>
+      <p:bgPr>
+        <a:solidFill>
+          <a:srgbClr val="FFFFFF"/>
+        </a:solidFill>
+      </p:bgPr>
+    </p:bg>
+    <p:spTree>
+      <p:nvGrpSpPr>
+        <p:cNvPr id="1" name=""/>
+        <p:cNvGrpSpPr/>
+        <p:nvPr/>
+      </p:nvGrpSpPr>
+      <p:grpSpPr>
+        <a:xfrm>
+          <a:off x="0" y="0"/>
+          <a:ext cx="0" cy="0"/>
+          <a:chOff x="0" y="0"/>
+          <a:chExt cx="0" cy="0"/>
+        </a:xfrm>
+      </p:grpSpPr>
+      <p:sp>
+        <p:nvSpPr>
+          <p:cNvPr id="2" name="Shape 0"/>
+          <p:cNvSpPr/>
+          <p:nvPr/>
+        </p:nvSpPr>
+        <p:spPr>
+          <a:xfrm>
+            <a:off x="0" y="0"/>
+            <a:ext cx="54864" cy="5143500"/>
+          </a:xfrm>
+          <a:prstGeom prst="rect">
+            <a:avLst/>
+          </a:prstGeom>
+          <a:solidFill>
+            <a:srgbClr val="1E2761"/>
+          </a:solidFill>
+          <a:ln/>
+        </p:spPr>
+      </p:sp>
+      <p:sp>
+        <p:nvSpPr>
+          <p:cNvPr id="3" name="Text 1"/>
+          <p:cNvSpPr/>
+          <p:nvPr/>
+        </p:nvSpPr>
+        <p:spPr>
+          <a:xfrm>
+            <a:off x="5486400" y="256032"/>
+            <a:ext cx="3337560" cy="228600"/>
+          </a:xfrm>
+          <a:prstGeom prst="rect">
+            <a:avLst/>
+          </a:prstGeom>
+          <a:noFill/>
+          <a:ln/>
+        </p:spPr>
+        <p:txBody>
+          <a:bodyPr wrap="square" lIns="0" tIns="0" rIns="0" bIns="0" rtlCol="0" anchor="ctr">
+            <a:normAutofit/>
+          </a:bodyPr>
+          <a:lstStyle/>
+          <a:p>
+            <a:pPr algn="r" indent="0" marL="0">
+              <a:buNone/>
+            </a:pPr>
+            <a:r>
+              <a:rPr lang="en-US" sz="950" dirty="0">
+                <a:solidFill>
+                  <a:srgbClr val="6B7280"/>
+                </a:solidFill>
+                <a:latin typeface="Calibri" pitchFamily="34" charset="0"/>
+                <a:ea typeface="Calibri" pitchFamily="34" charset="-122"/>
+                <a:cs typeface="Calibri" pitchFamily="34" charset="-120"/>
+              </a:rPr>
+              <a:t>Day 4 · Module 2</a:t>
+            </a:r>
+            <a:endParaRPr lang="en-US" sz="950" dirty="0"/>
+          </a:p>
+        </p:txBody>
+      </p:sp>
+      <p:sp>
+        <p:nvSpPr>
+          <p:cNvPr id="4" name="Text 2"/>
+          <p:cNvSpPr/>
+          <p:nvPr/>
+        </p:nvSpPr>
+        <p:spPr>
+          <a:xfrm>
+            <a:off x="365760" y="310896"/>
+            <a:ext cx="6583680" cy="603504"/>
+          </a:xfrm>
+          <a:prstGeom prst="rect">
+            <a:avLst/>
+          </a:prstGeom>
+          <a:noFill/>
+          <a:ln/>
+        </p:spPr>
+        <p:txBody>
+          <a:bodyPr wrap="square" lIns="0" tIns="0" rIns="0" bIns="0" rtlCol="0" anchor="ctr">
+            <a:normAutofit/>
+          </a:bodyPr>
+          <a:lstStyle/>
+          <a:p>
+            <a:pPr indent="0" marL="0">
+              <a:buNone/>
+            </a:pPr>
+            <a:r>
+              <a:rPr lang="en-US" sz="2500" b="1" dirty="0">
+                <a:solidFill>
+                  <a:srgbClr val="1E2761"/>
+                </a:solidFill>
+                <a:latin typeface="Calibri" pitchFamily="34" charset="0"/>
+                <a:ea typeface="Calibri" pitchFamily="34" charset="-122"/>
+                <a:cs typeface="Calibri" pitchFamily="34" charset="-120"/>
+              </a:rPr>
               <a:t>Strengths, weaknesses, and cost profile</a:t>
             </a:r>
             <a:endParaRPr lang="en-US" sz="2500" dirty="0"/>
@@ -4420,7 +5064,7 @@
       </p:sp>
       <p:graphicFrame>
         <p:nvGraphicFramePr>
-          <p:cNvPr id="16" name="Table 0"/>
+          <p:cNvPr id="17" name="Table 0"/>
           <p:cNvGraphicFramePr>
             <a:graphicFrameLocks noGrp="1"/>
           </p:cNvGraphicFramePr>
@@ -5757,9 +6401,9 @@
 </p:sld>
 </file>
 
-<file path=ppt/slides/slide16.xml><?xml version="1.0" encoding="utf-8"?>
+<file path=ppt/slides/slide17.xml><?xml version="1.0" encoding="utf-8"?>
 <p:sld xmlns:a="http://schemas.openxmlformats.org/drawingml/2006/main" xmlns:r="http://schemas.openxmlformats.org/officeDocument/2006/relationships" xmlns:p="http://schemas.openxmlformats.org/presentationml/2006/main">
-  <p:cSld name="Slide 16">
+  <p:cSld name="Slide 17">
     <p:bg>
       <p:bgPr>
         <a:solidFill>
@@ -9158,7 +9802,7 @@
     <p:bg>
       <p:bgPr>
         <a:solidFill>
-          <a:srgbClr val="FFFFFF"/>
+          <a:srgbClr val="CADCFC"/>
         </a:solidFill>
       </p:bgPr>
     </p:bg>
@@ -9185,7 +9829,7 @@
         <p:spPr>
           <a:xfrm>
             <a:off x="0" y="0"/>
-            <a:ext cx="54864" cy="5143500"/>
+            <a:ext cx="146304" cy="5143500"/>
           </a:xfrm>
           <a:prstGeom prst="rect">
             <a:avLst/>
@@ -9204,8 +9848,8 @@
         </p:nvSpPr>
         <p:spPr>
           <a:xfrm>
-            <a:off x="5486400" y="256032"/>
-            <a:ext cx="3337560" cy="228600"/>
+            <a:off x="5669280" y="274320"/>
+            <a:ext cx="3291840" cy="274320"/>
           </a:xfrm>
           <a:prstGeom prst="rect">
             <a:avLst/>
@@ -9214,16 +9858,14 @@
           <a:ln/>
         </p:spPr>
         <p:txBody>
-          <a:bodyPr wrap="square" lIns="0" tIns="0" rIns="0" bIns="0" rtlCol="0" anchor="ctr">
-            <a:normAutofit/>
-          </a:bodyPr>
+          <a:bodyPr wrap="square" lIns="0" tIns="0" rIns="0" bIns="0" rtlCol="0" anchor="ctr"/>
           <a:lstStyle/>
           <a:p>
             <a:pPr algn="r" indent="0" marL="0">
               <a:buNone/>
             </a:pPr>
             <a:r>
-              <a:rPr lang="en-US" sz="950" dirty="0">
+              <a:rPr lang="en-US" sz="1000" dirty="0">
                 <a:solidFill>
                   <a:srgbClr val="6B7280"/>
                 </a:solidFill>
@@ -9231,9 +9873,9 @@
                 <a:ea typeface="Calibri" pitchFamily="34" charset="-122"/>
                 <a:cs typeface="Calibri" pitchFamily="34" charset="-120"/>
               </a:rPr>
-              <a:t>Day 4 · Module 2</a:t>
-            </a:r>
-            <a:endParaRPr lang="en-US" sz="950" dirty="0"/>
+              <a:t>Day 4 · Module 2 · Demo</a:t>
+            </a:r>
+            <a:endParaRPr lang="en-US" sz="1000" dirty="0"/>
           </a:p>
         </p:txBody>
       </p:sp>
@@ -9245,8 +9887,8 @@
         </p:nvSpPr>
         <p:spPr>
           <a:xfrm>
-            <a:off x="365760" y="310896"/>
-            <a:ext cx="6583680" cy="603504"/>
+            <a:off x="548640" y="1051560"/>
+            <a:ext cx="5486400" cy="502920"/>
           </a:xfrm>
           <a:prstGeom prst="rect">
             <a:avLst/>
@@ -9255,16 +9897,14 @@
           <a:ln/>
         </p:spPr>
         <p:txBody>
-          <a:bodyPr wrap="square" lIns="0" tIns="0" rIns="0" bIns="0" rtlCol="0" anchor="ctr">
-            <a:normAutofit/>
-          </a:bodyPr>
+          <a:bodyPr wrap="square" lIns="0" tIns="0" rIns="0" bIns="0" rtlCol="0" anchor="ctr"/>
           <a:lstStyle/>
           <a:p>
             <a:pPr indent="0" marL="0">
               <a:buNone/>
             </a:pPr>
             <a:r>
-              <a:rPr lang="en-US" sz="2500" b="1" dirty="0">
+              <a:rPr lang="en-US" sz="3200" b="1" spc="800" kern="0" dirty="0">
                 <a:solidFill>
                   <a:srgbClr val="1E2761"/>
                 </a:solidFill>
@@ -9272,47 +9912,22 @@
                 <a:ea typeface="Calibri" pitchFamily="34" charset="-122"/>
                 <a:cs typeface="Calibri" pitchFamily="34" charset="-120"/>
               </a:rPr>
-              <a:t>Handoff — control transfers, not delegation</a:t>
-            </a:r>
-            <a:endParaRPr lang="en-US" sz="2500" dirty="0"/>
-          </a:p>
-        </p:txBody>
-      </p:sp>
-      <p:sp>
-        <p:nvSpPr>
-          <p:cNvPr id="5" name="Shape 3"/>
-          <p:cNvSpPr/>
-          <p:nvPr/>
-        </p:nvSpPr>
-        <p:spPr>
-          <a:xfrm>
-            <a:off x="365760" y="1078992"/>
-            <a:ext cx="4114800" cy="3493008"/>
-          </a:xfrm>
-          <a:prstGeom prst="roundRect">
-            <a:avLst/>
-          </a:prstGeom>
-          <a:solidFill>
-            <a:srgbClr val="F3F4F6"/>
-          </a:solidFill>
-          <a:ln w="11430">
-            <a:solidFill>
-              <a:srgbClr val="D1D5DB"/>
-            </a:solidFill>
-            <a:prstDash val="solid"/>
-          </a:ln>
-        </p:spPr>
-      </p:sp>
-      <p:sp>
-        <p:nvSpPr>
-          <p:cNvPr id="6" name="Text 4"/>
-          <p:cNvSpPr/>
-          <p:nvPr/>
-        </p:nvSpPr>
-        <p:spPr>
-          <a:xfrm>
-            <a:off x="566928" y="1298448"/>
-            <a:ext cx="3712464" cy="411480"/>
+              <a:t>DEMO</a:t>
+            </a:r>
+            <a:endParaRPr lang="en-US" sz="3200" dirty="0"/>
+          </a:p>
+        </p:txBody>
+      </p:sp>
+      <p:sp>
+        <p:nvSpPr>
+          <p:cNvPr id="5" name="Text 3"/>
+          <p:cNvSpPr/>
+          <p:nvPr/>
+        </p:nvSpPr>
+        <p:spPr>
+          <a:xfrm>
+            <a:off x="548640" y="1691640"/>
+            <a:ext cx="8046720" cy="914400"/>
           </a:xfrm>
           <a:prstGeom prst="rect">
             <a:avLst/>
@@ -9321,16 +9936,14 @@
           <a:ln/>
         </p:spPr>
         <p:txBody>
-          <a:bodyPr wrap="square" lIns="0" tIns="0" rIns="0" bIns="0" rtlCol="0" anchor="ctr">
-            <a:normAutofit/>
-          </a:bodyPr>
+          <a:bodyPr wrap="square" lIns="0" tIns="0" rIns="0" bIns="0" rtlCol="0" anchor="ctr"/>
           <a:lstStyle/>
           <a:p>
             <a:pPr indent="0" marL="0">
               <a:buNone/>
             </a:pPr>
             <a:r>
-              <a:rPr lang="en-US" sz="2000" b="1" dirty="0">
+              <a:rPr lang="en-US" sz="3000" b="1" dirty="0">
                 <a:solidFill>
                   <a:srgbClr val="1E2761"/>
                 </a:solidFill>
@@ -9338,22 +9951,22 @@
                 <a:ea typeface="Calibri" pitchFamily="34" charset="-122"/>
                 <a:cs typeface="Calibri" pitchFamily="34" charset="-120"/>
               </a:rPr>
-              <a:t>Agents as tools (Module 1 recap)</a:t>
-            </a:r>
-            <a:endParaRPr lang="en-US" sz="2000" dirty="0"/>
-          </a:p>
-        </p:txBody>
-      </p:sp>
-      <p:sp>
-        <p:nvSpPr>
-          <p:cNvPr id="7" name="Text 5"/>
-          <p:cNvSpPr/>
-          <p:nvPr/>
-        </p:nvSpPr>
-        <p:spPr>
-          <a:xfrm>
-            <a:off x="594360" y="1828800"/>
-            <a:ext cx="3639312" cy="2395728"/>
+              <a:t>ConcurrentBuilder proves it, wall-clock</a:t>
+            </a:r>
+            <a:endParaRPr lang="en-US" sz="3000" dirty="0"/>
+          </a:p>
+        </p:txBody>
+      </p:sp>
+      <p:sp>
+        <p:nvSpPr>
+          <p:cNvPr id="6" name="Text 4"/>
+          <p:cNvSpPr/>
+          <p:nvPr/>
+        </p:nvSpPr>
+        <p:spPr>
+          <a:xfrm>
+            <a:off x="6583680" y="1051560"/>
+            <a:ext cx="2194560" cy="502920"/>
           </a:xfrm>
           <a:prstGeom prst="rect">
             <a:avLst/>
@@ -9362,35 +9975,56 @@
           <a:ln/>
         </p:spPr>
         <p:txBody>
-          <a:bodyPr wrap="square" lIns="381" tIns="381" rIns="381" bIns="381" rtlCol="0" anchor="ctr">
-            <a:normAutofit/>
-          </a:bodyPr>
-          <a:lstStyle/>
-          <a:p>
-            <a:pPr marL="342900" indent="-342900">
-              <a:buSzPct val="100000"/>
-              <a:buChar char="•"/>
-            </a:pPr>
-            <a:r>
-              <a:rPr lang="en-US" sz="1300" dirty="0">
-                <a:solidFill>
-                  <a:srgbClr val="212121"/>
+          <a:bodyPr wrap="square" lIns="0" tIns="0" rIns="0" bIns="0" rtlCol="0" anchor="ctr"/>
+          <a:lstStyle/>
+          <a:p>
+            <a:pPr algn="r" indent="0" marL="0">
+              <a:buNone/>
+            </a:pPr>
+            <a:r>
+              <a:rPr lang="en-US" sz="1800" i="1" dirty="0">
+                <a:solidFill>
+                  <a:srgbClr val="6B7280"/>
                 </a:solidFill>
                 <a:latin typeface="Calibri" pitchFamily="34" charset="0"/>
                 <a:ea typeface="Calibri" pitchFamily="34" charset="-122"/>
                 <a:cs typeface="Calibri" pitchFamily="34" charset="-120"/>
               </a:rPr>
-              <a:t>Agents as tools (Module 1 recap)</a:t>
-            </a:r>
-            <a:endParaRPr lang="en-US" sz="1300" dirty="0"/>
-          </a:p>
-          <a:p>
-            <a:pPr marL="342900" indent="-342900">
-              <a:buSzPct val="100000"/>
-              <a:buChar char="•"/>
-            </a:pPr>
-            <a:r>
-              <a:rPr lang="en-US" sz="1300" dirty="0">
+              <a:t>~5 min</a:t>
+            </a:r>
+            <a:endParaRPr lang="en-US" sz="1800" dirty="0"/>
+          </a:p>
+        </p:txBody>
+      </p:sp>
+      <p:sp>
+        <p:nvSpPr>
+          <p:cNvPr id="7" name="Text 5"/>
+          <p:cNvSpPr/>
+          <p:nvPr/>
+        </p:nvSpPr>
+        <p:spPr>
+          <a:xfrm>
+            <a:off x="548640" y="2788920"/>
+            <a:ext cx="8046720" cy="1371600"/>
+          </a:xfrm>
+          <a:prstGeom prst="rect">
+            <a:avLst/>
+          </a:prstGeom>
+          <a:noFill/>
+          <a:ln/>
+        </p:spPr>
+        <p:txBody>
+          <a:bodyPr wrap="square" lIns="0" tIns="0" rIns="0" bIns="0" rtlCol="0" anchor="ctr"/>
+          <a:lstStyle/>
+          <a:p>
+            <a:pPr indent="0" marL="0">
+              <a:spcAft>
+                <a:spcPts val="600"/>
+              </a:spcAft>
+              <a:buNone/>
+            </a:pPr>
+            <a:r>
+              <a:rPr lang="en-US" sz="1600" dirty="0">
                 <a:solidFill>
                   <a:srgbClr val="212121"/>
                 </a:solidFill>
@@ -9398,177 +10032,54 @@
                 <a:ea typeface="Calibri" pitchFamily="34" charset="-122"/>
                 <a:cs typeface="Calibri" pitchFamily="34" charset="-120"/>
               </a:rPr>
-              <a:t>Outer agent keeps ownership; delegates a subtask</a:t>
-            </a:r>
-            <a:endParaRPr lang="en-US" sz="1300" dirty="0"/>
-          </a:p>
-          <a:p>
-            <a:pPr marL="342900" indent="-342900">
-              <a:buSzPct val="100000"/>
-              <a:buChar char="•"/>
-            </a:pPr>
-            <a:r>
-              <a:rPr lang="en-US" sz="1300" dirty="0">
-                <a:solidFill>
-                  <a:srgbClr val="212121"/>
+              <a:t>The previous slide's code prints three agents' responses one after another, which LOOKS sequential on the page. This demo times it for real: a small AgentMiddleware timestamps each agent's start/finish under ConcurrentBuilder and draws an ASCII overlap timeline, then the SAME three agents run again with plain sequential await agent.run(...) calls. Concurrent's total wall-clock lands close to one agent's own time; sequential lands close to the sum of all three — that gap is the proof.</a:t>
+            </a:r>
+            <a:endParaRPr lang="en-US" sz="1600" dirty="0"/>
+          </a:p>
+        </p:txBody>
+      </p:sp>
+      <p:sp>
+        <p:nvSpPr>
+          <p:cNvPr id="8" name="Text 6"/>
+          <p:cNvSpPr/>
+          <p:nvPr/>
+        </p:nvSpPr>
+        <p:spPr>
+          <a:xfrm>
+            <a:off x="548640" y="4434840"/>
+            <a:ext cx="8046720" cy="320040"/>
+          </a:xfrm>
+          <a:prstGeom prst="rect">
+            <a:avLst/>
+          </a:prstGeom>
+          <a:noFill/>
+          <a:ln/>
+        </p:spPr>
+        <p:txBody>
+          <a:bodyPr wrap="square" lIns="0" tIns="0" rIns="0" bIns="0" rtlCol="0" anchor="ctr"/>
+          <a:lstStyle/>
+          <a:p>
+            <a:pPr indent="0" marL="0">
+              <a:buNone/>
+            </a:pPr>
+            <a:r>
+              <a:rPr lang="en-US" sz="1100" i="1" dirty="0">
+                <a:solidFill>
+                  <a:srgbClr val="6B7280"/>
                 </a:solidFill>
                 <a:latin typeface="Calibri" pitchFamily="34" charset="0"/>
                 <a:ea typeface="Calibri" pitchFamily="34" charset="-122"/>
                 <a:cs typeface="Calibri" pitchFamily="34" charset="-120"/>
               </a:rPr>
-              <a:t>Control returns to the outer agent when the inner agent finishes</a:t>
-            </a:r>
-            <a:endParaRPr lang="en-US" sz="1300" dirty="0"/>
-          </a:p>
-        </p:txBody>
-      </p:sp>
-      <p:sp>
-        <p:nvSpPr>
-          <p:cNvPr id="8" name="Shape 6"/>
-          <p:cNvSpPr/>
-          <p:nvPr/>
-        </p:nvSpPr>
-        <p:spPr>
-          <a:xfrm>
-            <a:off x="4663440" y="1078992"/>
-            <a:ext cx="4114800" cy="3493008"/>
-          </a:xfrm>
-          <a:prstGeom prst="roundRect">
-            <a:avLst/>
-          </a:prstGeom>
-          <a:solidFill>
-            <a:srgbClr val="CADCFC"/>
-          </a:solidFill>
-          <a:ln w="11430">
-            <a:solidFill>
-              <a:srgbClr val="1E2761"/>
-            </a:solidFill>
-            <a:prstDash val="solid"/>
-          </a:ln>
-        </p:spPr>
-      </p:sp>
-      <p:sp>
-        <p:nvSpPr>
-          <p:cNvPr id="9" name="Text 7"/>
-          <p:cNvSpPr/>
-          <p:nvPr/>
-        </p:nvSpPr>
-        <p:spPr>
-          <a:xfrm>
-            <a:off x="4864608" y="1298448"/>
-            <a:ext cx="3712464" cy="411480"/>
-          </a:xfrm>
-          <a:prstGeom prst="rect">
-            <a:avLst/>
-          </a:prstGeom>
-          <a:noFill/>
-          <a:ln/>
-        </p:spPr>
-        <p:txBody>
-          <a:bodyPr wrap="square" lIns="0" tIns="0" rIns="0" bIns="0" rtlCol="0" anchor="ctr">
-            <a:normAutofit/>
-          </a:bodyPr>
-          <a:lstStyle/>
-          <a:p>
-            <a:pPr indent="0" marL="0">
-              <a:buNone/>
-            </a:pPr>
-            <a:r>
-              <a:rPr lang="en-US" sz="2000" b="1" dirty="0">
-                <a:solidFill>
-                  <a:srgbClr val="1E2761"/>
-                </a:solidFill>
-                <a:latin typeface="Calibri" pitchFamily="34" charset="0"/>
-                <a:ea typeface="Calibri" pitchFamily="34" charset="-122"/>
-                <a:cs typeface="Calibri" pitchFamily="34" charset="-120"/>
-              </a:rPr>
-              <a:t>Handoff</a:t>
-            </a:r>
-            <a:endParaRPr lang="en-US" sz="2000" dirty="0"/>
-          </a:p>
-        </p:txBody>
-      </p:sp>
-      <p:sp>
-        <p:nvSpPr>
-          <p:cNvPr id="10" name="Text 8"/>
-          <p:cNvSpPr/>
-          <p:nvPr/>
-        </p:nvSpPr>
-        <p:spPr>
-          <a:xfrm>
-            <a:off x="4892040" y="1828800"/>
-            <a:ext cx="3639312" cy="2395728"/>
-          </a:xfrm>
-          <a:prstGeom prst="rect">
-            <a:avLst/>
-          </a:prstGeom>
-          <a:noFill/>
-          <a:ln/>
-        </p:spPr>
-        <p:txBody>
-          <a:bodyPr wrap="square" lIns="381" tIns="381" rIns="381" bIns="381" rtlCol="0" anchor="ctr">
-            <a:normAutofit/>
-          </a:bodyPr>
-          <a:lstStyle/>
-          <a:p>
-            <a:pPr marL="342900" indent="-342900">
-              <a:buSzPct val="100000"/>
-              <a:buChar char="•"/>
-            </a:pPr>
-            <a:r>
-              <a:rPr lang="en-US" sz="1300" dirty="0">
-                <a:solidFill>
-                  <a:srgbClr val="212121"/>
-                </a:solidFill>
-                <a:latin typeface="Calibri" pitchFamily="34" charset="0"/>
-                <a:ea typeface="Calibri" pitchFamily="34" charset="-122"/>
-                <a:cs typeface="Calibri" pitchFamily="34" charset="-120"/>
-              </a:rPr>
-              <a:t>The receiving agent takes full ownership of the task</a:t>
-            </a:r>
-            <a:endParaRPr lang="en-US" sz="1300" dirty="0"/>
-          </a:p>
-          <a:p>
-            <a:pPr marL="342900" indent="-342900">
-              <a:buSzPct val="100000"/>
-              <a:buChar char="•"/>
-            </a:pPr>
-            <a:r>
-              <a:rPr lang="en-US" sz="1300" dirty="0">
-                <a:solidFill>
-                  <a:srgbClr val="212121"/>
-                </a:solidFill>
-                <a:latin typeface="Calibri" pitchFamily="34" charset="0"/>
-                <a:ea typeface="Calibri" pitchFamily="34" charset="-122"/>
-                <a:cs typeface="Calibri" pitchFamily="34" charset="-120"/>
-              </a:rPr>
-              <a:t>No central orchestrator — agents connect directly in a mesh topology</a:t>
-            </a:r>
-            <a:endParaRPr lang="en-US" sz="1300" dirty="0"/>
-          </a:p>
-          <a:p>
-            <a:pPr marL="342900" indent="-342900">
-              <a:buSzPct val="100000"/>
-              <a:buChar char="•"/>
-            </a:pPr>
-            <a:r>
-              <a:rPr lang="en-US" sz="1300" dirty="0">
-                <a:solidFill>
-                  <a:srgbClr val="212121"/>
-                </a:solidFill>
-                <a:latin typeface="Calibri" pitchFamily="34" charset="0"/>
-                <a:ea typeface="Calibri" pitchFamily="34" charset="-122"/>
-                <a:cs typeface="Calibri" pitchFamily="34" charset="-120"/>
-              </a:rPr>
-              <a:t>Good for customer support, expert systems, dynamic routing</a:t>
-            </a:r>
-            <a:endParaRPr lang="en-US" sz="1300" dirty="0"/>
-          </a:p>
-        </p:txBody>
-      </p:sp>
-      <p:sp>
-        <p:nvSpPr>
-          <p:cNvPr id="11" name="Shape 9"/>
+              <a:t>Runbook: demos/day4/module-2-demo-1-concurrent-parallelism.md</a:t>
+            </a:r>
+            <a:endParaRPr lang="en-US" sz="1100" dirty="0"/>
+          </a:p>
+        </p:txBody>
+      </p:sp>
+      <p:sp>
+        <p:nvSpPr>
+          <p:cNvPr id="9" name="Shape 7"/>
           <p:cNvSpPr/>
           <p:nvPr/>
         </p:nvSpPr>
@@ -9591,7 +10102,7 @@
       </p:sp>
       <p:sp>
         <p:nvSpPr>
-          <p:cNvPr id="12" name="Text 10"/>
+          <p:cNvPr id="10" name="Text 8"/>
           <p:cNvSpPr/>
           <p:nvPr/>
         </p:nvSpPr>
@@ -9624,7 +10135,7 @@
                 <a:ea typeface="Calibri" pitchFamily="34" charset="-122"/>
                 <a:cs typeface="Calibri" pitchFamily="34" charset="-120"/>
               </a:rPr>
-              <a:t>Source: https://learn.microsoft.com/en-us/agent-framework/workflows/orchestrations/handoff</a:t>
+              <a:t>Source: https://github.com/microsoft/agent-framework/blob/main/python/samples/03-workflows/orchestrations/concurrent_agents.py</a:t>
             </a:r>
             <a:endParaRPr lang="en-US" sz="820" dirty="0"/>
           </a:p>
@@ -9750,7 +10261,7 @@
               <a:buNone/>
             </a:pPr>
             <a:r>
-              <a:rPr lang="en-US" sz="2800" b="1" dirty="0">
+              <a:rPr lang="en-US" sz="2500" b="1" dirty="0">
                 <a:solidFill>
                   <a:srgbClr val="1E2761"/>
                 </a:solidFill>
@@ -9758,22 +10269,47 @@
                 <a:ea typeface="Calibri" pitchFamily="34" charset="-122"/>
                 <a:cs typeface="Calibri" pitchFamily="34" charset="-120"/>
               </a:rPr>
-              <a:t>Handoff — a mesh, not a hierarchy</a:t>
-            </a:r>
-            <a:endParaRPr lang="en-US" sz="2800" dirty="0"/>
-          </a:p>
-        </p:txBody>
-      </p:sp>
-      <p:sp>
-        <p:nvSpPr>
-          <p:cNvPr id="5" name="Text 3"/>
+              <a:t>Handoff — control transfers, not delegation</a:t>
+            </a:r>
+            <a:endParaRPr lang="en-US" sz="2500" dirty="0"/>
+          </a:p>
+        </p:txBody>
+      </p:sp>
+      <p:sp>
+        <p:nvSpPr>
+          <p:cNvPr id="5" name="Shape 3"/>
           <p:cNvSpPr/>
           <p:nvPr/>
         </p:nvSpPr>
         <p:spPr>
           <a:xfrm>
             <a:off x="365760" y="1078992"/>
-            <a:ext cx="4023360" cy="3630168"/>
+            <a:ext cx="4114800" cy="3493008"/>
+          </a:xfrm>
+          <a:prstGeom prst="roundRect">
+            <a:avLst/>
+          </a:prstGeom>
+          <a:solidFill>
+            <a:srgbClr val="F3F4F6"/>
+          </a:solidFill>
+          <a:ln w="11430">
+            <a:solidFill>
+              <a:srgbClr val="D1D5DB"/>
+            </a:solidFill>
+            <a:prstDash val="solid"/>
+          </a:ln>
+        </p:spPr>
+      </p:sp>
+      <p:sp>
+        <p:nvSpPr>
+          <p:cNvPr id="6" name="Text 4"/>
+          <p:cNvSpPr/>
+          <p:nvPr/>
+        </p:nvSpPr>
+        <p:spPr>
+          <a:xfrm>
+            <a:off x="566928" y="1298448"/>
+            <a:ext cx="3712464" cy="411480"/>
           </a:xfrm>
           <a:prstGeom prst="rect">
             <a:avLst/>
@@ -9782,41 +10318,58 @@
           <a:ln/>
         </p:spPr>
         <p:txBody>
-          <a:bodyPr wrap="square" lIns="0" tIns="0" rIns="0" bIns="0" rtlCol="0" anchor="t">
+          <a:bodyPr wrap="square" lIns="0" tIns="0" rIns="0" bIns="0" rtlCol="0" anchor="ctr">
             <a:normAutofit/>
           </a:bodyPr>
           <a:lstStyle/>
           <a:p>
-            <a:pPr marL="342900" indent="-342900">
-              <a:spcAft>
-                <a:spcPts val="1000"/>
-              </a:spcAft>
-              <a:buSzPct val="100000"/>
-              <a:buChar char="•"/>
-            </a:pPr>
-            <a:r>
-              <a:rPr lang="en-US" sz="1600" dirty="0">
-                <a:solidFill>
-                  <a:srgbClr val="212121"/>
+            <a:pPr indent="0" marL="0">
+              <a:buNone/>
+            </a:pPr>
+            <a:r>
+              <a:rPr lang="en-US" sz="2000" b="1" dirty="0">
+                <a:solidFill>
+                  <a:srgbClr val="1E2761"/>
                 </a:solidFill>
                 <a:latin typeface="Calibri" pitchFamily="34" charset="0"/>
                 <a:ea typeface="Calibri" pitchFamily="34" charset="-122"/>
                 <a:cs typeface="Calibri" pitchFamily="34" charset="-120"/>
               </a:rPr>
-              <a:t>Agents connect directly to each other — a mesh, not a star with a middle orchestrator</a:t>
-            </a:r>
-            <a:endParaRPr lang="en-US" sz="1600" dirty="0"/>
-          </a:p>
+              <a:t>Agents as tools (Module 1 recap)</a:t>
+            </a:r>
+            <a:endParaRPr lang="en-US" sz="2000" dirty="0"/>
+          </a:p>
+        </p:txBody>
+      </p:sp>
+      <p:sp>
+        <p:nvSpPr>
+          <p:cNvPr id="7" name="Text 5"/>
+          <p:cNvSpPr/>
+          <p:nvPr/>
+        </p:nvSpPr>
+        <p:spPr>
+          <a:xfrm>
+            <a:off x="594360" y="1828800"/>
+            <a:ext cx="3639312" cy="2395728"/>
+          </a:xfrm>
+          <a:prstGeom prst="rect">
+            <a:avLst/>
+          </a:prstGeom>
+          <a:noFill/>
+          <a:ln/>
+        </p:spPr>
+        <p:txBody>
+          <a:bodyPr wrap="square" lIns="381" tIns="381" rIns="381" bIns="381" rtlCol="0" anchor="ctr">
+            <a:normAutofit/>
+          </a:bodyPr>
+          <a:lstStyle/>
           <a:p>
             <a:pPr marL="342900" indent="-342900">
-              <a:spcAft>
-                <a:spcPts val="1000"/>
-              </a:spcAft>
               <a:buSzPct val="100000"/>
               <a:buChar char="•"/>
             </a:pPr>
             <a:r>
-              <a:rPr lang="en-US" sz="1600" dirty="0">
+              <a:rPr lang="en-US" sz="1300" dirty="0">
                 <a:solidFill>
                   <a:srgbClr val="212121"/>
                 </a:solidFill>
@@ -9824,20 +10377,17 @@
                 <a:ea typeface="Calibri" pitchFamily="34" charset="-122"/>
                 <a:cs typeface="Calibri" pitchFamily="34" charset="-120"/>
               </a:rPr>
-              <a:t>Any agent can hand the conversation fully to another agent it's configured to reach</a:t>
-            </a:r>
-            <a:endParaRPr lang="en-US" sz="1600" dirty="0"/>
+              <a:t>Agents as tools (Module 1 recap)</a:t>
+            </a:r>
+            <a:endParaRPr lang="en-US" sz="1300" dirty="0"/>
           </a:p>
           <a:p>
             <a:pPr marL="342900" indent="-342900">
-              <a:spcAft>
-                <a:spcPts val="1000"/>
-              </a:spcAft>
               <a:buSzPct val="100000"/>
               <a:buChar char="•"/>
             </a:pPr>
             <a:r>
-              <a:rPr lang="en-US" sz="1600" dirty="0">
+              <a:rPr lang="en-US" sz="1300" dirty="0">
                 <a:solidFill>
                   <a:srgbClr val="212121"/>
                 </a:solidFill>
@@ -9845,20 +10395,17 @@
                 <a:ea typeface="Calibri" pitchFamily="34" charset="-122"/>
                 <a:cs typeface="Calibri" pitchFamily="34" charset="-120"/>
               </a:rPr>
-              <a:t>Full conversation history travels with the handoff — the receiving agent has complete context</a:t>
-            </a:r>
-            <a:endParaRPr lang="en-US" sz="1600" dirty="0"/>
+              <a:t>Outer agent keeps ownership; delegates a subtask</a:t>
+            </a:r>
+            <a:endParaRPr lang="en-US" sz="1300" dirty="0"/>
           </a:p>
           <a:p>
             <a:pPr marL="342900" indent="-342900">
-              <a:spcAft>
-                <a:spcPts val="1000"/>
-              </a:spcAft>
               <a:buSzPct val="100000"/>
               <a:buChar char="•"/>
             </a:pPr>
             <a:r>
-              <a:rPr lang="en-US" sz="1600" dirty="0">
+              <a:rPr lang="en-US" sz="1300" dirty="0">
                 <a:solidFill>
                   <a:srgbClr val="212121"/>
                 </a:solidFill>
@@ -9866,39 +10413,159 @@
                 <a:ea typeface="Calibri" pitchFamily="34" charset="-122"/>
                 <a:cs typeface="Calibri" pitchFamily="34" charset="-120"/>
               </a:rPr>
-              <a:t>Interactive by default: control returns to the user whenever an agent responds without handing off</a:t>
-            </a:r>
-            <a:endParaRPr lang="en-US" sz="1600" dirty="0"/>
-          </a:p>
-        </p:txBody>
-      </p:sp>
-      <p:pic>
-        <p:nvPicPr>
-          <p:cNvPr id="6" name="Image 0" descr="[object Object]">    </p:cNvPr>
-          <p:cNvPicPr>
-            <a:picLocks noChangeAspect="1"/>
-          </p:cNvPicPr>
-          <p:nvPr/>
-        </p:nvPicPr>
-        <p:blipFill>
-          <a:blip r:embed="rId1"/>
-          <a:stretch>
-            <a:fillRect/>
-          </a:stretch>
-        </p:blipFill>
-        <p:spPr>
-          <a:xfrm>
-            <a:off x="4663440" y="1705271"/>
-            <a:ext cx="4114800" cy="2377610"/>
-          </a:xfrm>
-          <a:prstGeom prst="rect">
-            <a:avLst/>
-          </a:prstGeom>
-        </p:spPr>
-      </p:pic>
-      <p:sp>
-        <p:nvSpPr>
-          <p:cNvPr id="7" name="Shape 4"/>
+              <a:t>Control returns to the outer agent when the inner agent finishes</a:t>
+            </a:r>
+            <a:endParaRPr lang="en-US" sz="1300" dirty="0"/>
+          </a:p>
+        </p:txBody>
+      </p:sp>
+      <p:sp>
+        <p:nvSpPr>
+          <p:cNvPr id="8" name="Shape 6"/>
+          <p:cNvSpPr/>
+          <p:nvPr/>
+        </p:nvSpPr>
+        <p:spPr>
+          <a:xfrm>
+            <a:off x="4663440" y="1078992"/>
+            <a:ext cx="4114800" cy="3493008"/>
+          </a:xfrm>
+          <a:prstGeom prst="roundRect">
+            <a:avLst/>
+          </a:prstGeom>
+          <a:solidFill>
+            <a:srgbClr val="CADCFC"/>
+          </a:solidFill>
+          <a:ln w="11430">
+            <a:solidFill>
+              <a:srgbClr val="1E2761"/>
+            </a:solidFill>
+            <a:prstDash val="solid"/>
+          </a:ln>
+        </p:spPr>
+      </p:sp>
+      <p:sp>
+        <p:nvSpPr>
+          <p:cNvPr id="9" name="Text 7"/>
+          <p:cNvSpPr/>
+          <p:nvPr/>
+        </p:nvSpPr>
+        <p:spPr>
+          <a:xfrm>
+            <a:off x="4864608" y="1298448"/>
+            <a:ext cx="3712464" cy="411480"/>
+          </a:xfrm>
+          <a:prstGeom prst="rect">
+            <a:avLst/>
+          </a:prstGeom>
+          <a:noFill/>
+          <a:ln/>
+        </p:spPr>
+        <p:txBody>
+          <a:bodyPr wrap="square" lIns="0" tIns="0" rIns="0" bIns="0" rtlCol="0" anchor="ctr">
+            <a:normAutofit/>
+          </a:bodyPr>
+          <a:lstStyle/>
+          <a:p>
+            <a:pPr indent="0" marL="0">
+              <a:buNone/>
+            </a:pPr>
+            <a:r>
+              <a:rPr lang="en-US" sz="2000" b="1" dirty="0">
+                <a:solidFill>
+                  <a:srgbClr val="1E2761"/>
+                </a:solidFill>
+                <a:latin typeface="Calibri" pitchFamily="34" charset="0"/>
+                <a:ea typeface="Calibri" pitchFamily="34" charset="-122"/>
+                <a:cs typeface="Calibri" pitchFamily="34" charset="-120"/>
+              </a:rPr>
+              <a:t>Handoff</a:t>
+            </a:r>
+            <a:endParaRPr lang="en-US" sz="2000" dirty="0"/>
+          </a:p>
+        </p:txBody>
+      </p:sp>
+      <p:sp>
+        <p:nvSpPr>
+          <p:cNvPr id="10" name="Text 8"/>
+          <p:cNvSpPr/>
+          <p:nvPr/>
+        </p:nvSpPr>
+        <p:spPr>
+          <a:xfrm>
+            <a:off x="4892040" y="1828800"/>
+            <a:ext cx="3639312" cy="2395728"/>
+          </a:xfrm>
+          <a:prstGeom prst="rect">
+            <a:avLst/>
+          </a:prstGeom>
+          <a:noFill/>
+          <a:ln/>
+        </p:spPr>
+        <p:txBody>
+          <a:bodyPr wrap="square" lIns="381" tIns="381" rIns="381" bIns="381" rtlCol="0" anchor="ctr">
+            <a:normAutofit/>
+          </a:bodyPr>
+          <a:lstStyle/>
+          <a:p>
+            <a:pPr marL="342900" indent="-342900">
+              <a:buSzPct val="100000"/>
+              <a:buChar char="•"/>
+            </a:pPr>
+            <a:r>
+              <a:rPr lang="en-US" sz="1300" dirty="0">
+                <a:solidFill>
+                  <a:srgbClr val="212121"/>
+                </a:solidFill>
+                <a:latin typeface="Calibri" pitchFamily="34" charset="0"/>
+                <a:ea typeface="Calibri" pitchFamily="34" charset="-122"/>
+                <a:cs typeface="Calibri" pitchFamily="34" charset="-120"/>
+              </a:rPr>
+              <a:t>The receiving agent takes full ownership of the task</a:t>
+            </a:r>
+            <a:endParaRPr lang="en-US" sz="1300" dirty="0"/>
+          </a:p>
+          <a:p>
+            <a:pPr marL="342900" indent="-342900">
+              <a:buSzPct val="100000"/>
+              <a:buChar char="•"/>
+            </a:pPr>
+            <a:r>
+              <a:rPr lang="en-US" sz="1300" dirty="0">
+                <a:solidFill>
+                  <a:srgbClr val="212121"/>
+                </a:solidFill>
+                <a:latin typeface="Calibri" pitchFamily="34" charset="0"/>
+                <a:ea typeface="Calibri" pitchFamily="34" charset="-122"/>
+                <a:cs typeface="Calibri" pitchFamily="34" charset="-120"/>
+              </a:rPr>
+              <a:t>No central orchestrator — agents connect directly in a mesh topology</a:t>
+            </a:r>
+            <a:endParaRPr lang="en-US" sz="1300" dirty="0"/>
+          </a:p>
+          <a:p>
+            <a:pPr marL="342900" indent="-342900">
+              <a:buSzPct val="100000"/>
+              <a:buChar char="•"/>
+            </a:pPr>
+            <a:r>
+              <a:rPr lang="en-US" sz="1300" dirty="0">
+                <a:solidFill>
+                  <a:srgbClr val="212121"/>
+                </a:solidFill>
+                <a:latin typeface="Calibri" pitchFamily="34" charset="0"/>
+                <a:ea typeface="Calibri" pitchFamily="34" charset="-122"/>
+                <a:cs typeface="Calibri" pitchFamily="34" charset="-120"/>
+              </a:rPr>
+              <a:t>Good for customer support, expert systems, dynamic routing</a:t>
+            </a:r>
+            <a:endParaRPr lang="en-US" sz="1300" dirty="0"/>
+          </a:p>
+        </p:txBody>
+      </p:sp>
+      <p:sp>
+        <p:nvSpPr>
+          <p:cNvPr id="11" name="Shape 9"/>
           <p:cNvSpPr/>
           <p:nvPr/>
         </p:nvSpPr>
@@ -9921,7 +10588,7 @@
       </p:sp>
       <p:sp>
         <p:nvSpPr>
-          <p:cNvPr id="8" name="Text 5"/>
+          <p:cNvPr id="12" name="Text 10"/>
           <p:cNvSpPr/>
           <p:nvPr/>
         </p:nvSpPr>
@@ -10088,7 +10755,7 @@
                 <a:ea typeface="Calibri" pitchFamily="34" charset="-122"/>
                 <a:cs typeface="Calibri" pitchFamily="34" charset="-120"/>
               </a:rPr>
-              <a:t>Handoff in code</a:t>
+              <a:t>Handoff — a mesh, not a hierarchy</a:t>
             </a:r>
             <a:endParaRPr lang="en-US" sz="2800" dirty="0"/>
           </a:p>
@@ -10096,39 +10763,14 @@
       </p:sp>
       <p:sp>
         <p:nvSpPr>
-          <p:cNvPr id="5" name="Shape 3"/>
-          <p:cNvSpPr/>
-          <p:nvPr/>
-        </p:nvSpPr>
-        <p:spPr>
-          <a:xfrm>
-            <a:off x="365760" y="1115568"/>
-            <a:ext cx="8412480" cy="2888234"/>
-          </a:xfrm>
-          <a:prstGeom prst="rect">
-            <a:avLst/>
-          </a:prstGeom>
-          <a:solidFill>
-            <a:srgbClr val="1D1E22"/>
-          </a:solidFill>
-          <a:ln w="9525">
-            <a:solidFill>
-              <a:srgbClr val="2A2B2E"/>
-            </a:solidFill>
-            <a:prstDash val="solid"/>
-          </a:ln>
-        </p:spPr>
-      </p:sp>
-      <p:sp>
-        <p:nvSpPr>
-          <p:cNvPr id="6" name="Text 4"/>
-          <p:cNvSpPr/>
-          <p:nvPr/>
-        </p:nvSpPr>
-        <p:spPr>
-          <a:xfrm>
-            <a:off x="502920" y="1207008"/>
-            <a:ext cx="8138160" cy="2705354"/>
+          <p:cNvPr id="5" name="Text 3"/>
+          <p:cNvSpPr/>
+          <p:nvPr/>
+        </p:nvSpPr>
+        <p:spPr>
+          <a:xfrm>
+            <a:off x="365760" y="1078992"/>
+            <a:ext cx="4023360" cy="3630168"/>
           </a:xfrm>
           <a:prstGeom prst="rect">
             <a:avLst/>
@@ -10142,317 +10784,118 @@
           </a:bodyPr>
           <a:lstStyle/>
           <a:p>
-            <a:pPr indent="0" marL="0">
-              <a:buNone/>
-            </a:pPr>
-            <a:r>
-              <a:rPr lang="en-US" sz="1280" dirty="0">
-                <a:solidFill>
-                  <a:srgbClr val="A996B6"/>
-                </a:solidFill>
-                <a:latin typeface="Consolas" pitchFamily="34" charset="0"/>
-                <a:ea typeface="Consolas" pitchFamily="34" charset="-122"/>
-                <a:cs typeface="Consolas" pitchFamily="34" charset="-120"/>
-              </a:rPr>
-              <a:t>from</a:t>
-            </a:r>
-            <a:pPr indent="0" marL="0">
-              <a:buNone/>
-            </a:pPr>
-            <a:r>
-              <a:rPr lang="en-US" sz="1280" dirty="0">
-                <a:solidFill>
-                  <a:srgbClr val="FFFFFF"/>
-                </a:solidFill>
-                <a:latin typeface="Consolas" pitchFamily="34" charset="0"/>
-                <a:ea typeface="Consolas" pitchFamily="34" charset="-122"/>
-                <a:cs typeface="Consolas" pitchFamily="34" charset="-120"/>
-              </a:rPr>
-              <a:t> agent_framework.orchestrations </a:t>
-            </a:r>
-            <a:pPr indent="0" marL="0">
-              <a:buNone/>
-            </a:pPr>
-            <a:r>
-              <a:rPr lang="en-US" sz="1280" dirty="0">
-                <a:solidFill>
-                  <a:srgbClr val="A996B6"/>
-                </a:solidFill>
-                <a:latin typeface="Consolas" pitchFamily="34" charset="0"/>
-                <a:ea typeface="Consolas" pitchFamily="34" charset="-122"/>
-                <a:cs typeface="Consolas" pitchFamily="34" charset="-120"/>
-              </a:rPr>
-              <a:t>import</a:t>
-            </a:r>
-            <a:pPr indent="0" marL="0">
-              <a:buNone/>
-            </a:pPr>
-            <a:r>
-              <a:rPr lang="en-US" sz="1280" dirty="0">
-                <a:solidFill>
-                  <a:srgbClr val="FFFFFF"/>
-                </a:solidFill>
-                <a:latin typeface="Consolas" pitchFamily="34" charset="0"/>
-                <a:ea typeface="Consolas" pitchFamily="34" charset="-122"/>
-                <a:cs typeface="Consolas" pitchFamily="34" charset="-120"/>
-              </a:rPr>
-              <a:t> HandoffBuilder</a:t>
-            </a:r>
-            <a:endParaRPr lang="en-US" sz="1280" dirty="0"/>
-          </a:p>
-          <a:p>
-            <a:pPr indent="0" marL="0">
-              <a:buNone/>
-            </a:pPr>
-            <a:endParaRPr lang="en-US" sz="1280" dirty="0"/>
-          </a:p>
-          <a:p>
-            <a:pPr indent="0" marL="0">
-              <a:buNone/>
-            </a:pPr>
-            <a:r>
-              <a:rPr lang="en-US" sz="1280" dirty="0">
-                <a:solidFill>
-                  <a:srgbClr val="FFFFFF"/>
-                </a:solidFill>
-                <a:latin typeface="Consolas" pitchFamily="34" charset="0"/>
-                <a:ea typeface="Consolas" pitchFamily="34" charset="-122"/>
-                <a:cs typeface="Consolas" pitchFamily="34" charset="-120"/>
-              </a:rPr>
-              <a:t>workflow = (</a:t>
-            </a:r>
-            <a:endParaRPr lang="en-US" sz="1280" dirty="0"/>
-          </a:p>
-          <a:p>
-            <a:pPr indent="0" marL="0">
-              <a:buNone/>
-            </a:pPr>
-            <a:r>
-              <a:rPr lang="en-US" sz="1280" dirty="0">
-                <a:solidFill>
-                  <a:srgbClr val="FFFFFF"/>
-                </a:solidFill>
-                <a:latin typeface="Consolas" pitchFamily="34" charset="0"/>
-                <a:ea typeface="Consolas" pitchFamily="34" charset="-122"/>
-                <a:cs typeface="Consolas" pitchFamily="34" charset="-120"/>
-              </a:rPr>
-              <a:t>    HandoffBuilder(</a:t>
-            </a:r>
-            <a:endParaRPr lang="en-US" sz="1280" dirty="0"/>
-          </a:p>
-          <a:p>
-            <a:pPr indent="0" marL="0">
-              <a:buNone/>
-            </a:pPr>
-            <a:r>
-              <a:rPr lang="en-US" sz="1280" dirty="0">
-                <a:solidFill>
-                  <a:srgbClr val="FFFFFF"/>
-                </a:solidFill>
-                <a:latin typeface="Consolas" pitchFamily="34" charset="0"/>
-                <a:ea typeface="Consolas" pitchFamily="34" charset="-122"/>
-                <a:cs typeface="Consolas" pitchFamily="34" charset="-120"/>
-              </a:rPr>
-              <a:t>        name=</a:t>
-            </a:r>
-            <a:pPr indent="0" marL="0">
-              <a:buNone/>
-            </a:pPr>
-            <a:r>
-              <a:rPr lang="en-US" sz="1280" dirty="0">
-                <a:solidFill>
-                  <a:srgbClr val="E4C98A"/>
-                </a:solidFill>
-                <a:latin typeface="Consolas" pitchFamily="34" charset="0"/>
-                <a:ea typeface="Consolas" pitchFamily="34" charset="-122"/>
-                <a:cs typeface="Consolas" pitchFamily="34" charset="-120"/>
-              </a:rPr>
-              <a:t>"customer_support"</a:t>
-            </a:r>
-            <a:pPr indent="0" marL="0">
-              <a:buNone/>
-            </a:pPr>
-            <a:r>
-              <a:rPr lang="en-US" sz="1280" dirty="0">
-                <a:solidFill>
-                  <a:srgbClr val="FFFFFF"/>
-                </a:solidFill>
-                <a:latin typeface="Consolas" pitchFamily="34" charset="0"/>
-                <a:ea typeface="Consolas" pitchFamily="34" charset="-122"/>
-                <a:cs typeface="Consolas" pitchFamily="34" charset="-120"/>
-              </a:rPr>
-              <a:t>,</a:t>
-            </a:r>
-            <a:endParaRPr lang="en-US" sz="1280" dirty="0"/>
-          </a:p>
-          <a:p>
-            <a:pPr indent="0" marL="0">
-              <a:buNone/>
-            </a:pPr>
-            <a:r>
-              <a:rPr lang="en-US" sz="1280" dirty="0">
-                <a:solidFill>
-                  <a:srgbClr val="FFFFFF"/>
-                </a:solidFill>
-                <a:latin typeface="Consolas" pitchFamily="34" charset="0"/>
-                <a:ea typeface="Consolas" pitchFamily="34" charset="-122"/>
-                <a:cs typeface="Consolas" pitchFamily="34" charset="-120"/>
-              </a:rPr>
-              <a:t>        participants=[triage_agent, refund_agent, order_agent, return_agent],</a:t>
-            </a:r>
-            <a:endParaRPr lang="en-US" sz="1280" dirty="0"/>
-          </a:p>
-          <a:p>
-            <a:pPr indent="0" marL="0">
-              <a:buNone/>
-            </a:pPr>
-            <a:r>
-              <a:rPr lang="en-US" sz="1280" dirty="0">
-                <a:solidFill>
-                  <a:srgbClr val="FFFFFF"/>
-                </a:solidFill>
-                <a:latin typeface="Consolas" pitchFamily="34" charset="0"/>
-                <a:ea typeface="Consolas" pitchFamily="34" charset="-122"/>
-                <a:cs typeface="Consolas" pitchFamily="34" charset="-120"/>
-              </a:rPr>
-              <a:t>    )</a:t>
-            </a:r>
-            <a:endParaRPr lang="en-US" sz="1280" dirty="0"/>
-          </a:p>
-          <a:p>
-            <a:pPr indent="0" marL="0">
-              <a:buNone/>
-            </a:pPr>
-            <a:r>
-              <a:rPr lang="en-US" sz="1280" dirty="0">
-                <a:solidFill>
-                  <a:srgbClr val="FFFFFF"/>
-                </a:solidFill>
-                <a:latin typeface="Consolas" pitchFamily="34" charset="0"/>
-                <a:ea typeface="Consolas" pitchFamily="34" charset="-122"/>
-                <a:cs typeface="Consolas" pitchFamily="34" charset="-120"/>
-              </a:rPr>
-              <a:t>    .with_start_agent(triage_agent)</a:t>
-            </a:r>
-            <a:endParaRPr lang="en-US" sz="1280" dirty="0"/>
-          </a:p>
-          <a:p>
-            <a:pPr indent="0" marL="0">
-              <a:buNone/>
-            </a:pPr>
-            <a:r>
-              <a:rPr lang="en-US" sz="1280" dirty="0">
-                <a:solidFill>
-                  <a:srgbClr val="FFFFFF"/>
-                </a:solidFill>
-                <a:latin typeface="Consolas" pitchFamily="34" charset="0"/>
-                <a:ea typeface="Consolas" pitchFamily="34" charset="-122"/>
-                <a:cs typeface="Consolas" pitchFamily="34" charset="-120"/>
-              </a:rPr>
-              <a:t>    .add_handoff(triage_agent, [order_agent, return_agent])</a:t>
-            </a:r>
-            <a:endParaRPr lang="en-US" sz="1280" dirty="0"/>
-          </a:p>
-          <a:p>
-            <a:pPr indent="0" marL="0">
-              <a:buNone/>
-            </a:pPr>
-            <a:r>
-              <a:rPr lang="en-US" sz="1280" dirty="0">
-                <a:solidFill>
-                  <a:srgbClr val="FFFFFF"/>
-                </a:solidFill>
-                <a:latin typeface="Consolas" pitchFamily="34" charset="0"/>
-                <a:ea typeface="Consolas" pitchFamily="34" charset="-122"/>
-                <a:cs typeface="Consolas" pitchFamily="34" charset="-120"/>
-              </a:rPr>
-              <a:t>    .add_handoff(return_agent, [refund_agent])</a:t>
-            </a:r>
-            <a:endParaRPr lang="en-US" sz="1280" dirty="0"/>
-          </a:p>
-          <a:p>
-            <a:pPr indent="0" marL="0">
-              <a:buNone/>
-            </a:pPr>
-            <a:r>
-              <a:rPr lang="en-US" sz="1280" dirty="0">
-                <a:solidFill>
-                  <a:srgbClr val="FFFFFF"/>
-                </a:solidFill>
-                <a:latin typeface="Consolas" pitchFamily="34" charset="0"/>
-                <a:ea typeface="Consolas" pitchFamily="34" charset="-122"/>
-                <a:cs typeface="Consolas" pitchFamily="34" charset="-120"/>
-              </a:rPr>
-              <a:t>    .build()</a:t>
-            </a:r>
-            <a:endParaRPr lang="en-US" sz="1280" dirty="0"/>
-          </a:p>
-          <a:p>
-            <a:pPr indent="0" marL="0">
-              <a:buNone/>
-            </a:pPr>
-            <a:r>
-              <a:rPr lang="en-US" sz="1280" dirty="0">
-                <a:solidFill>
-                  <a:srgbClr val="FFFFFF"/>
-                </a:solidFill>
-                <a:latin typeface="Consolas" pitchFamily="34" charset="0"/>
-                <a:ea typeface="Consolas" pitchFamily="34" charset="-122"/>
-                <a:cs typeface="Consolas" pitchFamily="34" charset="-120"/>
-              </a:rPr>
-              <a:t>)</a:t>
-            </a:r>
-            <a:endParaRPr lang="en-US" sz="1280" dirty="0"/>
-          </a:p>
-        </p:txBody>
-      </p:sp>
-      <p:sp>
-        <p:nvSpPr>
-          <p:cNvPr id="7" name="Text 5"/>
-          <p:cNvSpPr/>
-          <p:nvPr/>
-        </p:nvSpPr>
-        <p:spPr>
-          <a:xfrm>
-            <a:off x="365760" y="4131818"/>
-            <a:ext cx="8412480" cy="577342"/>
-          </a:xfrm>
-          <a:prstGeom prst="rect">
-            <a:avLst/>
-          </a:prstGeom>
-          <a:noFill/>
-          <a:ln/>
-        </p:spPr>
-        <p:txBody>
-          <a:bodyPr wrap="square" lIns="0" tIns="0" rIns="0" bIns="0" rtlCol="0" anchor="t">
-            <a:normAutofit/>
-          </a:bodyPr>
-          <a:lstStyle/>
-          <a:p>
-            <a:pPr indent="0" marL="0">
+            <a:pPr marL="342900" indent="-342900">
               <a:spcAft>
-                <a:spcPts val="800"/>
+                <a:spcPts val="1000"/>
               </a:spcAft>
-              <a:buNone/>
-            </a:pPr>
-            <a:r>
-              <a:rPr lang="en-US" sz="1300" dirty="0">
-                <a:solidFill>
-                  <a:srgbClr val="6B7280"/>
+              <a:buSzPct val="100000"/>
+              <a:buChar char="•"/>
+            </a:pPr>
+            <a:r>
+              <a:rPr lang="en-US" sz="1600" dirty="0">
+                <a:solidFill>
+                  <a:srgbClr val="212121"/>
                 </a:solidFill>
                 <a:latin typeface="Calibri" pitchFamily="34" charset="0"/>
                 <a:ea typeface="Calibri" pitchFamily="34" charset="-122"/>
                 <a:cs typeface="Calibri" pitchFamily="34" charset="-120"/>
               </a:rPr>
-              <a:t>Handoff is interactive by default — when an agent responds without handing off, control returns to the user for the next input.</a:t>
-            </a:r>
-            <a:endParaRPr lang="en-US" sz="1300" dirty="0"/>
-          </a:p>
-        </p:txBody>
-      </p:sp>
-      <p:sp>
-        <p:nvSpPr>
-          <p:cNvPr id="8" name="Shape 6"/>
+              <a:t>Agents connect directly to each other — a mesh, not a star with a middle orchestrator</a:t>
+            </a:r>
+            <a:endParaRPr lang="en-US" sz="1600" dirty="0"/>
+          </a:p>
+          <a:p>
+            <a:pPr marL="342900" indent="-342900">
+              <a:spcAft>
+                <a:spcPts val="1000"/>
+              </a:spcAft>
+              <a:buSzPct val="100000"/>
+              <a:buChar char="•"/>
+            </a:pPr>
+            <a:r>
+              <a:rPr lang="en-US" sz="1600" dirty="0">
+                <a:solidFill>
+                  <a:srgbClr val="212121"/>
+                </a:solidFill>
+                <a:latin typeface="Calibri" pitchFamily="34" charset="0"/>
+                <a:ea typeface="Calibri" pitchFamily="34" charset="-122"/>
+                <a:cs typeface="Calibri" pitchFamily="34" charset="-120"/>
+              </a:rPr>
+              <a:t>Any agent can hand the conversation fully to another agent it's configured to reach</a:t>
+            </a:r>
+            <a:endParaRPr lang="en-US" sz="1600" dirty="0"/>
+          </a:p>
+          <a:p>
+            <a:pPr marL="342900" indent="-342900">
+              <a:spcAft>
+                <a:spcPts val="1000"/>
+              </a:spcAft>
+              <a:buSzPct val="100000"/>
+              <a:buChar char="•"/>
+            </a:pPr>
+            <a:r>
+              <a:rPr lang="en-US" sz="1600" dirty="0">
+                <a:solidFill>
+                  <a:srgbClr val="212121"/>
+                </a:solidFill>
+                <a:latin typeface="Calibri" pitchFamily="34" charset="0"/>
+                <a:ea typeface="Calibri" pitchFamily="34" charset="-122"/>
+                <a:cs typeface="Calibri" pitchFamily="34" charset="-120"/>
+              </a:rPr>
+              <a:t>Full conversation history travels with the handoff — the receiving agent has complete context</a:t>
+            </a:r>
+            <a:endParaRPr lang="en-US" sz="1600" dirty="0"/>
+          </a:p>
+          <a:p>
+            <a:pPr marL="342900" indent="-342900">
+              <a:spcAft>
+                <a:spcPts val="1000"/>
+              </a:spcAft>
+              <a:buSzPct val="100000"/>
+              <a:buChar char="•"/>
+            </a:pPr>
+            <a:r>
+              <a:rPr lang="en-US" sz="1600" dirty="0">
+                <a:solidFill>
+                  <a:srgbClr val="212121"/>
+                </a:solidFill>
+                <a:latin typeface="Calibri" pitchFamily="34" charset="0"/>
+                <a:ea typeface="Calibri" pitchFamily="34" charset="-122"/>
+                <a:cs typeface="Calibri" pitchFamily="34" charset="-120"/>
+              </a:rPr>
+              <a:t>Interactive by default: control returns to the user whenever an agent responds without handing off</a:t>
+            </a:r>
+            <a:endParaRPr lang="en-US" sz="1600" dirty="0"/>
+          </a:p>
+        </p:txBody>
+      </p:sp>
+      <p:pic>
+        <p:nvPicPr>
+          <p:cNvPr id="6" name="Image 0" descr="[object Object]">    </p:cNvPr>
+          <p:cNvPicPr>
+            <a:picLocks noChangeAspect="1"/>
+          </p:cNvPicPr>
+          <p:nvPr/>
+        </p:nvPicPr>
+        <p:blipFill>
+          <a:blip r:embed="rId1"/>
+          <a:stretch>
+            <a:fillRect/>
+          </a:stretch>
+        </p:blipFill>
+        <p:spPr>
+          <a:xfrm>
+            <a:off x="4663440" y="1705271"/>
+            <a:ext cx="4114800" cy="2377610"/>
+          </a:xfrm>
+          <a:prstGeom prst="rect">
+            <a:avLst/>
+          </a:prstGeom>
+        </p:spPr>
+      </p:pic>
+      <p:sp>
+        <p:nvSpPr>
+          <p:cNvPr id="7" name="Shape 4"/>
           <p:cNvSpPr/>
           <p:nvPr/>
         </p:nvSpPr>
@@ -10475,7 +10918,7 @@
       </p:sp>
       <p:sp>
         <p:nvSpPr>
-          <p:cNvPr id="9" name="Text 7"/>
+          <p:cNvPr id="8" name="Text 5"/>
           <p:cNvSpPr/>
           <p:nvPr/>
         </p:nvSpPr>
